--- a/figures/diagrams/experiments_overview.pptx
+++ b/figures/diagrams/experiments_overview.pptx
@@ -259,7 +259,7 @@
           <a:p>
             <a:fld id="{1C0AB43A-F4B9-9F4B-A921-8C9A7BD2278A}" type="datetimeFigureOut">
               <a:rPr lang="en-US" smtClean="0"/>
-              <a:t>9/29/25</a:t>
+              <a:t>9/30/25</a:t>
             </a:fld>
             <a:endParaRPr lang="en-US"/>
           </a:p>
@@ -457,7 +457,7 @@
           <a:p>
             <a:fld id="{1C0AB43A-F4B9-9F4B-A921-8C9A7BD2278A}" type="datetimeFigureOut">
               <a:rPr lang="en-US" smtClean="0"/>
-              <a:t>9/29/25</a:t>
+              <a:t>9/30/25</a:t>
             </a:fld>
             <a:endParaRPr lang="en-US"/>
           </a:p>
@@ -665,7 +665,7 @@
           <a:p>
             <a:fld id="{1C0AB43A-F4B9-9F4B-A921-8C9A7BD2278A}" type="datetimeFigureOut">
               <a:rPr lang="en-US" smtClean="0"/>
-              <a:t>9/29/25</a:t>
+              <a:t>9/30/25</a:t>
             </a:fld>
             <a:endParaRPr lang="en-US"/>
           </a:p>
@@ -863,7 +863,7 @@
           <a:p>
             <a:fld id="{1C0AB43A-F4B9-9F4B-A921-8C9A7BD2278A}" type="datetimeFigureOut">
               <a:rPr lang="en-US" smtClean="0"/>
-              <a:t>9/29/25</a:t>
+              <a:t>9/30/25</a:t>
             </a:fld>
             <a:endParaRPr lang="en-US"/>
           </a:p>
@@ -1138,7 +1138,7 @@
           <a:p>
             <a:fld id="{1C0AB43A-F4B9-9F4B-A921-8C9A7BD2278A}" type="datetimeFigureOut">
               <a:rPr lang="en-US" smtClean="0"/>
-              <a:t>9/29/25</a:t>
+              <a:t>9/30/25</a:t>
             </a:fld>
             <a:endParaRPr lang="en-US"/>
           </a:p>
@@ -1403,7 +1403,7 @@
           <a:p>
             <a:fld id="{1C0AB43A-F4B9-9F4B-A921-8C9A7BD2278A}" type="datetimeFigureOut">
               <a:rPr lang="en-US" smtClean="0"/>
-              <a:t>9/29/25</a:t>
+              <a:t>9/30/25</a:t>
             </a:fld>
             <a:endParaRPr lang="en-US"/>
           </a:p>
@@ -1815,7 +1815,7 @@
           <a:p>
             <a:fld id="{1C0AB43A-F4B9-9F4B-A921-8C9A7BD2278A}" type="datetimeFigureOut">
               <a:rPr lang="en-US" smtClean="0"/>
-              <a:t>9/29/25</a:t>
+              <a:t>9/30/25</a:t>
             </a:fld>
             <a:endParaRPr lang="en-US"/>
           </a:p>
@@ -1956,7 +1956,7 @@
           <a:p>
             <a:fld id="{1C0AB43A-F4B9-9F4B-A921-8C9A7BD2278A}" type="datetimeFigureOut">
               <a:rPr lang="en-US" smtClean="0"/>
-              <a:t>9/29/25</a:t>
+              <a:t>9/30/25</a:t>
             </a:fld>
             <a:endParaRPr lang="en-US"/>
           </a:p>
@@ -2069,7 +2069,7 @@
           <a:p>
             <a:fld id="{1C0AB43A-F4B9-9F4B-A921-8C9A7BD2278A}" type="datetimeFigureOut">
               <a:rPr lang="en-US" smtClean="0"/>
-              <a:t>9/29/25</a:t>
+              <a:t>9/30/25</a:t>
             </a:fld>
             <a:endParaRPr lang="en-US"/>
           </a:p>
@@ -2380,7 +2380,7 @@
           <a:p>
             <a:fld id="{1C0AB43A-F4B9-9F4B-A921-8C9A7BD2278A}" type="datetimeFigureOut">
               <a:rPr lang="en-US" smtClean="0"/>
-              <a:t>9/29/25</a:t>
+              <a:t>9/30/25</a:t>
             </a:fld>
             <a:endParaRPr lang="en-US"/>
           </a:p>
@@ -2668,7 +2668,7 @@
           <a:p>
             <a:fld id="{1C0AB43A-F4B9-9F4B-A921-8C9A7BD2278A}" type="datetimeFigureOut">
               <a:rPr lang="en-US" smtClean="0"/>
-              <a:t>9/29/25</a:t>
+              <a:t>9/30/25</a:t>
             </a:fld>
             <a:endParaRPr lang="en-US"/>
           </a:p>
@@ -2909,7 +2909,7 @@
           <a:p>
             <a:fld id="{1C0AB43A-F4B9-9F4B-A921-8C9A7BD2278A}" type="datetimeFigureOut">
               <a:rPr lang="en-US" smtClean="0"/>
-              <a:t>9/29/25</a:t>
+              <a:t>9/30/25</a:t>
             </a:fld>
             <a:endParaRPr lang="en-US"/>
           </a:p>
@@ -3334,6 +3334,98 @@
       </p:grpSpPr>
       <p:pic>
         <p:nvPicPr>
+          <p:cNvPr id="80" name="Picture 79">
+            <a:extLst>
+              <a:ext uri="{FF2B5EF4-FFF2-40B4-BE49-F238E27FC236}">
+                <a16:creationId xmlns:a16="http://schemas.microsoft.com/office/drawing/2014/main" id="{C1D319C8-7286-C9D5-1285-745205497D6F}"/>
+              </a:ext>
+            </a:extLst>
+          </p:cNvPr>
+          <p:cNvPicPr>
+            <a:picLocks noChangeAspect="1"/>
+          </p:cNvPicPr>
+          <p:nvPr/>
+        </p:nvPicPr>
+        <p:blipFill>
+          <a:blip r:embed="rId2"/>
+          <a:stretch>
+            <a:fillRect/>
+          </a:stretch>
+        </p:blipFill>
+        <p:spPr>
+          <a:xfrm>
+            <a:off x="7633135" y="2502102"/>
+            <a:ext cx="1290868" cy="1417320"/>
+          </a:xfrm>
+          <a:prstGeom prst="rect">
+            <a:avLst/>
+          </a:prstGeom>
+        </p:spPr>
+      </p:pic>
+      <p:pic>
+        <p:nvPicPr>
+          <p:cNvPr id="12" name="Picture 11">
+            <a:extLst>
+              <a:ext uri="{FF2B5EF4-FFF2-40B4-BE49-F238E27FC236}">
+                <a16:creationId xmlns:a16="http://schemas.microsoft.com/office/drawing/2014/main" id="{AC1706D6-1539-7123-82E5-E4B9B76BBC5F}"/>
+              </a:ext>
+            </a:extLst>
+          </p:cNvPr>
+          <p:cNvPicPr>
+            <a:picLocks noChangeAspect="1"/>
+          </p:cNvPicPr>
+          <p:nvPr/>
+        </p:nvPicPr>
+        <p:blipFill>
+          <a:blip r:embed="rId3"/>
+          <a:srcRect l="18006" t="34092" b="1"/>
+          <a:stretch>
+            <a:fillRect/>
+          </a:stretch>
+        </p:blipFill>
+        <p:spPr>
+          <a:xfrm>
+            <a:off x="7197387" y="3368537"/>
+            <a:ext cx="842433" cy="424417"/>
+          </a:xfrm>
+          <a:prstGeom prst="rect">
+            <a:avLst/>
+          </a:prstGeom>
+        </p:spPr>
+      </p:pic>
+      <p:pic>
+        <p:nvPicPr>
+          <p:cNvPr id="14" name="Picture 13">
+            <a:extLst>
+              <a:ext uri="{FF2B5EF4-FFF2-40B4-BE49-F238E27FC236}">
+                <a16:creationId xmlns:a16="http://schemas.microsoft.com/office/drawing/2014/main" id="{92EF21C9-FE52-B943-6DA5-74A225F70D4B}"/>
+              </a:ext>
+            </a:extLst>
+          </p:cNvPr>
+          <p:cNvPicPr>
+            <a:picLocks noChangeAspect="1"/>
+          </p:cNvPicPr>
+          <p:nvPr/>
+        </p:nvPicPr>
+        <p:blipFill>
+          <a:blip r:embed="rId3"/>
+          <a:srcRect l="18006" t="34092" b="1"/>
+          <a:stretch>
+            <a:fillRect/>
+          </a:stretch>
+        </p:blipFill>
+        <p:spPr>
+          <a:xfrm flipH="1">
+            <a:off x="8547784" y="3361624"/>
+            <a:ext cx="842433" cy="424417"/>
+          </a:xfrm>
+          <a:prstGeom prst="rect">
+            <a:avLst/>
+          </a:prstGeom>
+        </p:spPr>
+      </p:pic>
+      <p:pic>
+        <p:nvPicPr>
           <p:cNvPr id="59" name="Picture 28" descr="Wood Floor Transparent Background Vectors &amp; Illustrations for Free Download  | Freepik">
             <a:extLst>
               <a:ext uri="{FF2B5EF4-FFF2-40B4-BE49-F238E27FC236}">
@@ -3347,7 +3439,7 @@
           <p:nvPr/>
         </p:nvPicPr>
         <p:blipFill rotWithShape="1">
-          <a:blip r:embed="rId2">
+          <a:blip r:embed="rId4">
             <a:alphaModFix/>
             <a:extLst>
               <a:ext uri="{28A0092B-C50C-407E-A947-70E740481C1C}">
@@ -3393,7 +3485,7 @@
           <p:nvPr/>
         </p:nvPicPr>
         <p:blipFill>
-          <a:blip r:embed="rId3"/>
+          <a:blip r:embed="rId2"/>
           <a:stretch>
             <a:fillRect/>
           </a:stretch>
@@ -3410,36 +3502,6 @@
       </p:pic>
       <p:pic>
         <p:nvPicPr>
-          <p:cNvPr id="80" name="Picture 79">
-            <a:extLst>
-              <a:ext uri="{FF2B5EF4-FFF2-40B4-BE49-F238E27FC236}">
-                <a16:creationId xmlns:a16="http://schemas.microsoft.com/office/drawing/2014/main" id="{C1D319C8-7286-C9D5-1285-745205497D6F}"/>
-              </a:ext>
-            </a:extLst>
-          </p:cNvPr>
-          <p:cNvPicPr>
-            <a:picLocks noChangeAspect="1"/>
-          </p:cNvPicPr>
-          <p:nvPr/>
-        </p:nvPicPr>
-        <p:blipFill>
-          <a:blip r:embed="rId3"/>
-          <a:stretch>
-            <a:fillRect/>
-          </a:stretch>
-        </p:blipFill>
-        <p:spPr>
-          <a:xfrm>
-            <a:off x="7633135" y="2502102"/>
-            <a:ext cx="1290868" cy="1417320"/>
-          </a:xfrm>
-          <a:prstGeom prst="rect">
-            <a:avLst/>
-          </a:prstGeom>
-        </p:spPr>
-      </p:pic>
-      <p:pic>
-        <p:nvPicPr>
           <p:cNvPr id="9" name="Picture 28" descr="Wood Floor Transparent Background Vectors &amp; Illustrations for Free Download  | Freepik">
             <a:extLst>
               <a:ext uri="{FF2B5EF4-FFF2-40B4-BE49-F238E27FC236}">
@@ -3453,7 +3515,7 @@
           <p:nvPr/>
         </p:nvPicPr>
         <p:blipFill rotWithShape="1">
-          <a:blip r:embed="rId2">
+          <a:blip r:embed="rId4">
             <a:alphaModFix/>
             <a:extLst>
               <a:ext uri="{28A0092B-C50C-407E-A947-70E740481C1C}">
@@ -3499,7 +3561,7 @@
           <p:nvPr/>
         </p:nvPicPr>
         <p:blipFill>
-          <a:blip r:embed="rId3"/>
+          <a:blip r:embed="rId2"/>
           <a:stretch>
             <a:fillRect/>
           </a:stretch>
@@ -3529,7 +3591,7 @@
           <p:nvPr/>
         </p:nvPicPr>
         <p:blipFill rotWithShape="1">
-          <a:blip r:embed="rId2">
+          <a:blip r:embed="rId4">
             <a:extLst>
               <a:ext uri="{28A0092B-C50C-407E-A947-70E740481C1C}">
                 <a14:useLocalDpi xmlns:a14="http://schemas.microsoft.com/office/drawing/2010/main" val="0"/>
@@ -3574,7 +3636,7 @@
           <p:nvPr/>
         </p:nvPicPr>
         <p:blipFill>
-          <a:blip r:embed="rId3"/>
+          <a:blip r:embed="rId2"/>
           <a:stretch>
             <a:fillRect/>
           </a:stretch>
@@ -3604,7 +3666,7 @@
           <p:nvPr/>
         </p:nvPicPr>
         <p:blipFill>
-          <a:blip r:embed="rId4"/>
+          <a:blip r:embed="rId5"/>
           <a:stretch>
             <a:fillRect/>
           </a:stretch>
@@ -3634,7 +3696,7 @@
           <p:nvPr/>
         </p:nvPicPr>
         <p:blipFill rotWithShape="1">
-          <a:blip r:embed="rId2">
+          <a:blip r:embed="rId4">
             <a:extLst>
               <a:ext uri="{28A0092B-C50C-407E-A947-70E740481C1C}">
                 <a14:useLocalDpi xmlns:a14="http://schemas.microsoft.com/office/drawing/2010/main" val="0"/>
@@ -3679,7 +3741,7 @@
           <p:nvPr/>
         </p:nvPicPr>
         <p:blipFill>
-          <a:blip r:embed="rId4"/>
+          <a:blip r:embed="rId5"/>
           <a:stretch>
             <a:fillRect/>
           </a:stretch>
@@ -3709,7 +3771,7 @@
           <p:nvPr/>
         </p:nvPicPr>
         <p:blipFill rotWithShape="1">
-          <a:blip r:embed="rId2">
+          <a:blip r:embed="rId4">
             <a:extLst>
               <a:ext uri="{28A0092B-C50C-407E-A947-70E740481C1C}">
                 <a14:useLocalDpi xmlns:a14="http://schemas.microsoft.com/office/drawing/2010/main" val="0"/>
@@ -3897,10 +3959,10 @@
       </p:sp>
       <p:sp>
         <p:nvSpPr>
-          <p:cNvPr id="1055" name="Rectangle 1054">
-            <a:extLst>
-              <a:ext uri="{FF2B5EF4-FFF2-40B4-BE49-F238E27FC236}">
-                <a16:creationId xmlns:a16="http://schemas.microsoft.com/office/drawing/2014/main" id="{695AC2FE-70E6-387A-86C5-F40ED7901311}"/>
+          <p:cNvPr id="1085" name="Right Arrow 1084">
+            <a:extLst>
+              <a:ext uri="{FF2B5EF4-FFF2-40B4-BE49-F238E27FC236}">
+                <a16:creationId xmlns:a16="http://schemas.microsoft.com/office/drawing/2014/main" id="{26011355-D993-477E-8311-28F2E846C621}"/>
               </a:ext>
             </a:extLst>
           </p:cNvPr>
@@ -3908,14 +3970,16 @@
           <p:nvPr/>
         </p:nvSpPr>
         <p:spPr>
-          <a:xfrm>
-            <a:off x="7096700" y="2445677"/>
-            <a:ext cx="2411896" cy="1298787"/>
-          </a:xfrm>
-          <a:prstGeom prst="rect">
-            <a:avLst/>
-          </a:prstGeom>
-          <a:noFill/>
+          <a:xfrm rot="5400000">
+            <a:off x="6819887" y="3372155"/>
+            <a:ext cx="5943600" cy="118872"/>
+          </a:xfrm>
+          <a:prstGeom prst="rightArrow">
+            <a:avLst/>
+          </a:prstGeom>
+          <a:solidFill>
+            <a:schemeClr val="tx1"/>
+          </a:solidFill>
           <a:ln>
             <a:solidFill>
               <a:schemeClr val="tx1"/>
@@ -3949,10 +4013,154 @@
       </p:sp>
       <p:sp>
         <p:nvSpPr>
-          <p:cNvPr id="1085" name="Right Arrow 1084">
-            <a:extLst>
-              <a:ext uri="{FF2B5EF4-FFF2-40B4-BE49-F238E27FC236}">
-                <a16:creationId xmlns:a16="http://schemas.microsoft.com/office/drawing/2014/main" id="{26011355-D993-477E-8311-28F2E846C621}"/>
+          <p:cNvPr id="1086" name="TextBox 1085">
+            <a:extLst>
+              <a:ext uri="{FF2B5EF4-FFF2-40B4-BE49-F238E27FC236}">
+                <a16:creationId xmlns:a16="http://schemas.microsoft.com/office/drawing/2014/main" id="{03962489-EF53-0307-021C-553B7B3F995E}"/>
+              </a:ext>
+            </a:extLst>
+          </p:cNvPr>
+          <p:cNvSpPr txBox="1"/>
+          <p:nvPr/>
+        </p:nvSpPr>
+        <p:spPr>
+          <a:xfrm>
+            <a:off x="9430305" y="6345272"/>
+            <a:ext cx="756356" cy="369332"/>
+          </a:xfrm>
+          <a:prstGeom prst="rect">
+            <a:avLst/>
+          </a:prstGeom>
+          <a:noFill/>
+        </p:spPr>
+        <p:txBody>
+          <a:bodyPr wrap="square" rtlCol="0">
+            <a:spAutoFit/>
+          </a:bodyPr>
+          <a:lstStyle/>
+          <a:p>
+            <a:pPr algn="ctr"/>
+            <a:r>
+              <a:rPr lang="en-US" dirty="0"/>
+              <a:t>time</a:t>
+            </a:r>
+          </a:p>
+        </p:txBody>
+      </p:sp>
+      <p:sp>
+        <p:nvSpPr>
+          <p:cNvPr id="1087" name="TextBox 1086">
+            <a:extLst>
+              <a:ext uri="{FF2B5EF4-FFF2-40B4-BE49-F238E27FC236}">
+                <a16:creationId xmlns:a16="http://schemas.microsoft.com/office/drawing/2014/main" id="{D50394D2-DA15-E829-0BC1-A6EEBDAF130D}"/>
+              </a:ext>
+            </a:extLst>
+          </p:cNvPr>
+          <p:cNvSpPr txBox="1"/>
+          <p:nvPr/>
+        </p:nvSpPr>
+        <p:spPr>
+          <a:xfrm>
+            <a:off x="2220967" y="74943"/>
+            <a:ext cx="1919111" cy="400110"/>
+          </a:xfrm>
+          <a:prstGeom prst="rect">
+            <a:avLst/>
+          </a:prstGeom>
+          <a:noFill/>
+        </p:spPr>
+        <p:txBody>
+          <a:bodyPr wrap="square" rtlCol="0">
+            <a:spAutoFit/>
+          </a:bodyPr>
+          <a:lstStyle/>
+          <a:p>
+            <a:pPr algn="ctr"/>
+            <a:r>
+              <a:rPr lang="en-US" sz="2000" b="1" dirty="0"/>
+              <a:t>Experiment 1</a:t>
+            </a:r>
+          </a:p>
+        </p:txBody>
+      </p:sp>
+      <p:sp>
+        <p:nvSpPr>
+          <p:cNvPr id="1088" name="TextBox 1087">
+            <a:extLst>
+              <a:ext uri="{FF2B5EF4-FFF2-40B4-BE49-F238E27FC236}">
+                <a16:creationId xmlns:a16="http://schemas.microsoft.com/office/drawing/2014/main" id="{40F30551-534E-AA66-D94E-07F2AD6492D2}"/>
+              </a:ext>
+            </a:extLst>
+          </p:cNvPr>
+          <p:cNvSpPr txBox="1"/>
+          <p:nvPr/>
+        </p:nvSpPr>
+        <p:spPr>
+          <a:xfrm>
+            <a:off x="4786238" y="74943"/>
+            <a:ext cx="1919111" cy="400110"/>
+          </a:xfrm>
+          <a:prstGeom prst="rect">
+            <a:avLst/>
+          </a:prstGeom>
+          <a:noFill/>
+        </p:spPr>
+        <p:txBody>
+          <a:bodyPr wrap="square" rtlCol="0">
+            <a:spAutoFit/>
+          </a:bodyPr>
+          <a:lstStyle/>
+          <a:p>
+            <a:pPr algn="ctr"/>
+            <a:r>
+              <a:rPr lang="en-US" sz="2000" b="1" dirty="0"/>
+              <a:t>Experiment 2</a:t>
+            </a:r>
+          </a:p>
+        </p:txBody>
+      </p:sp>
+      <p:sp>
+        <p:nvSpPr>
+          <p:cNvPr id="1089" name="TextBox 1088">
+            <a:extLst>
+              <a:ext uri="{FF2B5EF4-FFF2-40B4-BE49-F238E27FC236}">
+                <a16:creationId xmlns:a16="http://schemas.microsoft.com/office/drawing/2014/main" id="{7DC6053D-AB38-0BF6-68BD-8209CBB72704}"/>
+              </a:ext>
+            </a:extLst>
+          </p:cNvPr>
+          <p:cNvSpPr txBox="1"/>
+          <p:nvPr/>
+        </p:nvSpPr>
+        <p:spPr>
+          <a:xfrm>
+            <a:off x="7348965" y="74943"/>
+            <a:ext cx="1919111" cy="400110"/>
+          </a:xfrm>
+          <a:prstGeom prst="rect">
+            <a:avLst/>
+          </a:prstGeom>
+          <a:noFill/>
+        </p:spPr>
+        <p:txBody>
+          <a:bodyPr wrap="square" rtlCol="0">
+            <a:spAutoFit/>
+          </a:bodyPr>
+          <a:lstStyle/>
+          <a:p>
+            <a:pPr algn="ctr"/>
+            <a:r>
+              <a:rPr lang="en-US" sz="2000" b="1" dirty="0"/>
+              <a:t>Experiment 3</a:t>
+            </a:r>
+          </a:p>
+        </p:txBody>
+      </p:sp>
+      <p:sp>
+        <p:nvSpPr>
+          <p:cNvPr id="1091" name="Rectangle 1090">
+            <a:extLst>
+              <a:ext uri="{FF2B5EF4-FFF2-40B4-BE49-F238E27FC236}">
+                <a16:creationId xmlns:a16="http://schemas.microsoft.com/office/drawing/2014/main" id="{BE2A8D32-A416-D505-944F-CBD5BFFF438D}"/>
               </a:ext>
             </a:extLst>
           </p:cNvPr>
@@ -3960,21 +4168,15 @@
           <p:nvPr/>
         </p:nvSpPr>
         <p:spPr>
-          <a:xfrm rot="5400000">
-            <a:off x="6819887" y="3372155"/>
-            <a:ext cx="5943600" cy="118872"/>
-          </a:xfrm>
-          <a:prstGeom prst="rightArrow">
-            <a:avLst/>
-          </a:prstGeom>
-          <a:solidFill>
-            <a:schemeClr val="tx1"/>
-          </a:solidFill>
-          <a:ln>
-            <a:solidFill>
-              <a:schemeClr val="tx1"/>
-            </a:solidFill>
-          </a:ln>
+          <a:xfrm>
+            <a:off x="1979991" y="4458554"/>
+            <a:ext cx="4977167" cy="1885748"/>
+          </a:xfrm>
+          <a:prstGeom prst="rect">
+            <a:avLst/>
+          </a:prstGeom>
+          <a:noFill/>
+          <a:ln w="28575"/>
         </p:spPr>
         <p:style>
           <a:lnRef idx="2">
@@ -4003,10 +4205,10 @@
       </p:sp>
       <p:sp>
         <p:nvSpPr>
-          <p:cNvPr id="1086" name="TextBox 1085">
-            <a:extLst>
-              <a:ext uri="{FF2B5EF4-FFF2-40B4-BE49-F238E27FC236}">
-                <a16:creationId xmlns:a16="http://schemas.microsoft.com/office/drawing/2014/main" id="{03962489-EF53-0307-021C-553B7B3F995E}"/>
+          <p:cNvPr id="1092" name="TextBox 1091">
+            <a:extLst>
+              <a:ext uri="{FF2B5EF4-FFF2-40B4-BE49-F238E27FC236}">
+                <a16:creationId xmlns:a16="http://schemas.microsoft.com/office/drawing/2014/main" id="{17E1B944-DB2C-D64A-E337-3090C7090216}"/>
               </a:ext>
             </a:extLst>
           </p:cNvPr>
@@ -4015,8 +4217,8 @@
         </p:nvSpPr>
         <p:spPr>
           <a:xfrm>
-            <a:off x="9430305" y="6345272"/>
-            <a:ext cx="756356" cy="369332"/>
+            <a:off x="2307609" y="4493487"/>
+            <a:ext cx="4321930" cy="1815882"/>
           </a:xfrm>
           <a:prstGeom prst="rect">
             <a:avLst/>
@@ -4031,142 +4233,52 @@
           <a:p>
             <a:pPr algn="ctr"/>
             <a:r>
-              <a:rPr lang="en-US" dirty="0"/>
-              <a:t>time</a:t>
-            </a:r>
-          </a:p>
-        </p:txBody>
-      </p:sp>
-      <p:sp>
-        <p:nvSpPr>
-          <p:cNvPr id="1087" name="TextBox 1086">
-            <a:extLst>
-              <a:ext uri="{FF2B5EF4-FFF2-40B4-BE49-F238E27FC236}">
-                <a16:creationId xmlns:a16="http://schemas.microsoft.com/office/drawing/2014/main" id="{D50394D2-DA15-E829-0BC1-A6EEBDAF130D}"/>
-              </a:ext>
-            </a:extLst>
-          </p:cNvPr>
-          <p:cNvSpPr txBox="1"/>
-          <p:nvPr/>
-        </p:nvSpPr>
-        <p:spPr>
-          <a:xfrm>
-            <a:off x="2220967" y="74943"/>
-            <a:ext cx="1919111" cy="400110"/>
+              <a:rPr lang="en-US" sz="2800" dirty="0"/>
+              <a:t>Granny has only one thank-you sticker.</a:t>
+            </a:r>
+          </a:p>
+          <a:p>
+            <a:pPr algn="ctr"/>
+            <a:r>
+              <a:rPr lang="en-US" sz="2800" dirty="0"/>
+              <a:t>Should she give it to </a:t>
+            </a:r>
+          </a:p>
+          <a:p>
+            <a:pPr algn="ctr"/>
+            <a:r>
+              <a:rPr lang="en-US" sz="2800" dirty="0"/>
+              <a:t>Andy or Suzy?</a:t>
+            </a:r>
+          </a:p>
+        </p:txBody>
+      </p:sp>
+      <p:sp>
+        <p:nvSpPr>
+          <p:cNvPr id="16" name="Rectangle 15">
+            <a:extLst>
+              <a:ext uri="{FF2B5EF4-FFF2-40B4-BE49-F238E27FC236}">
+                <a16:creationId xmlns:a16="http://schemas.microsoft.com/office/drawing/2014/main" id="{10CF4162-8215-4328-A6B5-B408FC12EDB0}"/>
+              </a:ext>
+            </a:extLst>
+          </p:cNvPr>
+          <p:cNvSpPr/>
+          <p:nvPr/>
+        </p:nvSpPr>
+        <p:spPr>
+          <a:xfrm>
+            <a:off x="4538493" y="2432022"/>
+            <a:ext cx="2411896" cy="1895060"/>
           </a:xfrm>
           <a:prstGeom prst="rect">
             <a:avLst/>
           </a:prstGeom>
           <a:noFill/>
-        </p:spPr>
-        <p:txBody>
-          <a:bodyPr wrap="square" rtlCol="0">
-            <a:spAutoFit/>
-          </a:bodyPr>
-          <a:lstStyle/>
-          <a:p>
-            <a:pPr algn="ctr"/>
-            <a:r>
-              <a:rPr lang="en-US" sz="2000" b="1" dirty="0"/>
-              <a:t>Experiment 1</a:t>
-            </a:r>
-          </a:p>
-        </p:txBody>
-      </p:sp>
-      <p:sp>
-        <p:nvSpPr>
-          <p:cNvPr id="1088" name="TextBox 1087">
-            <a:extLst>
-              <a:ext uri="{FF2B5EF4-FFF2-40B4-BE49-F238E27FC236}">
-                <a16:creationId xmlns:a16="http://schemas.microsoft.com/office/drawing/2014/main" id="{40F30551-534E-AA66-D94E-07F2AD6492D2}"/>
-              </a:ext>
-            </a:extLst>
-          </p:cNvPr>
-          <p:cNvSpPr txBox="1"/>
-          <p:nvPr/>
-        </p:nvSpPr>
-        <p:spPr>
-          <a:xfrm>
-            <a:off x="4786238" y="74943"/>
-            <a:ext cx="1919111" cy="400110"/>
-          </a:xfrm>
-          <a:prstGeom prst="rect">
-            <a:avLst/>
-          </a:prstGeom>
-          <a:noFill/>
-        </p:spPr>
-        <p:txBody>
-          <a:bodyPr wrap="square" rtlCol="0">
-            <a:spAutoFit/>
-          </a:bodyPr>
-          <a:lstStyle/>
-          <a:p>
-            <a:pPr algn="ctr"/>
-            <a:r>
-              <a:rPr lang="en-US" sz="2000" b="1" dirty="0"/>
-              <a:t>Experiment 2</a:t>
-            </a:r>
-          </a:p>
-        </p:txBody>
-      </p:sp>
-      <p:sp>
-        <p:nvSpPr>
-          <p:cNvPr id="1089" name="TextBox 1088">
-            <a:extLst>
-              <a:ext uri="{FF2B5EF4-FFF2-40B4-BE49-F238E27FC236}">
-                <a16:creationId xmlns:a16="http://schemas.microsoft.com/office/drawing/2014/main" id="{7DC6053D-AB38-0BF6-68BD-8209CBB72704}"/>
-              </a:ext>
-            </a:extLst>
-          </p:cNvPr>
-          <p:cNvSpPr txBox="1"/>
-          <p:nvPr/>
-        </p:nvSpPr>
-        <p:spPr>
-          <a:xfrm>
-            <a:off x="7348965" y="74943"/>
-            <a:ext cx="1919111" cy="400110"/>
-          </a:xfrm>
-          <a:prstGeom prst="rect">
-            <a:avLst/>
-          </a:prstGeom>
-          <a:noFill/>
-        </p:spPr>
-        <p:txBody>
-          <a:bodyPr wrap="square" rtlCol="0">
-            <a:spAutoFit/>
-          </a:bodyPr>
-          <a:lstStyle/>
-          <a:p>
-            <a:pPr algn="ctr"/>
-            <a:r>
-              <a:rPr lang="en-US" sz="2000" b="1" dirty="0"/>
-              <a:t>Experiment 3</a:t>
-            </a:r>
-          </a:p>
-        </p:txBody>
-      </p:sp>
-      <p:sp>
-        <p:nvSpPr>
-          <p:cNvPr id="1091" name="Rectangle 1090">
-            <a:extLst>
-              <a:ext uri="{FF2B5EF4-FFF2-40B4-BE49-F238E27FC236}">
-                <a16:creationId xmlns:a16="http://schemas.microsoft.com/office/drawing/2014/main" id="{BE2A8D32-A416-D505-944F-CBD5BFFF438D}"/>
-              </a:ext>
-            </a:extLst>
-          </p:cNvPr>
-          <p:cNvSpPr/>
-          <p:nvPr/>
-        </p:nvSpPr>
-        <p:spPr>
-          <a:xfrm>
-            <a:off x="1979991" y="4458554"/>
-            <a:ext cx="4977167" cy="1885748"/>
-          </a:xfrm>
-          <a:prstGeom prst="rect">
-            <a:avLst/>
-          </a:prstGeom>
-          <a:noFill/>
-          <a:ln w="28575"/>
+          <a:ln>
+            <a:solidFill>
+              <a:schemeClr val="tx1"/>
+            </a:solidFill>
+          </a:ln>
         </p:spPr>
         <p:style>
           <a:lnRef idx="2">
@@ -4195,60 +4307,10 @@
       </p:sp>
       <p:sp>
         <p:nvSpPr>
-          <p:cNvPr id="1092" name="TextBox 1091">
-            <a:extLst>
-              <a:ext uri="{FF2B5EF4-FFF2-40B4-BE49-F238E27FC236}">
-                <a16:creationId xmlns:a16="http://schemas.microsoft.com/office/drawing/2014/main" id="{17E1B944-DB2C-D64A-E337-3090C7090216}"/>
-              </a:ext>
-            </a:extLst>
-          </p:cNvPr>
-          <p:cNvSpPr txBox="1"/>
-          <p:nvPr/>
-        </p:nvSpPr>
-        <p:spPr>
-          <a:xfrm>
-            <a:off x="2307609" y="4493487"/>
-            <a:ext cx="4321930" cy="1815882"/>
-          </a:xfrm>
-          <a:prstGeom prst="rect">
-            <a:avLst/>
-          </a:prstGeom>
-          <a:noFill/>
-        </p:spPr>
-        <p:txBody>
-          <a:bodyPr wrap="square" rtlCol="0">
-            <a:spAutoFit/>
-          </a:bodyPr>
-          <a:lstStyle/>
-          <a:p>
-            <a:pPr algn="ctr"/>
-            <a:r>
-              <a:rPr lang="en-US" sz="2800" dirty="0"/>
-              <a:t>Granny has only one thank-you sticker.</a:t>
-            </a:r>
-          </a:p>
-          <a:p>
-            <a:pPr algn="ctr"/>
-            <a:r>
-              <a:rPr lang="en-US" sz="2800" dirty="0"/>
-              <a:t>Should she give it to </a:t>
-            </a:r>
-          </a:p>
-          <a:p>
-            <a:pPr algn="ctr"/>
-            <a:r>
-              <a:rPr lang="en-US" sz="2800" dirty="0"/>
-              <a:t>Andy or Suzy?</a:t>
-            </a:r>
-          </a:p>
-        </p:txBody>
-      </p:sp>
-      <p:sp>
-        <p:nvSpPr>
-          <p:cNvPr id="16" name="Rectangle 15">
-            <a:extLst>
-              <a:ext uri="{FF2B5EF4-FFF2-40B4-BE49-F238E27FC236}">
-                <a16:creationId xmlns:a16="http://schemas.microsoft.com/office/drawing/2014/main" id="{10CF4162-8215-4328-A6B5-B408FC12EDB0}"/>
+          <p:cNvPr id="35" name="Rectangle 34">
+            <a:extLst>
+              <a:ext uri="{FF2B5EF4-FFF2-40B4-BE49-F238E27FC236}">
+                <a16:creationId xmlns:a16="http://schemas.microsoft.com/office/drawing/2014/main" id="{CE27BC5A-2FC9-7D91-CEFC-26B6545DE43C}"/>
               </a:ext>
             </a:extLst>
           </p:cNvPr>
@@ -4257,7 +4319,7 @@
         </p:nvSpPr>
         <p:spPr>
           <a:xfrm>
-            <a:off x="4538493" y="2432022"/>
+            <a:off x="1970269" y="2432022"/>
             <a:ext cx="2411896" cy="1895060"/>
           </a:xfrm>
           <a:prstGeom prst="rect">
@@ -4297,10 +4359,46 @@
       </p:sp>
       <p:sp>
         <p:nvSpPr>
-          <p:cNvPr id="35" name="Rectangle 34">
-            <a:extLst>
-              <a:ext uri="{FF2B5EF4-FFF2-40B4-BE49-F238E27FC236}">
-                <a16:creationId xmlns:a16="http://schemas.microsoft.com/office/drawing/2014/main" id="{CE27BC5A-2FC9-7D91-CEFC-26B6545DE43C}"/>
+          <p:cNvPr id="39" name="TextBox 38">
+            <a:extLst>
+              <a:ext uri="{FF2B5EF4-FFF2-40B4-BE49-F238E27FC236}">
+                <a16:creationId xmlns:a16="http://schemas.microsoft.com/office/drawing/2014/main" id="{0CF44CC8-69B9-37C9-D777-525736851D2E}"/>
+              </a:ext>
+            </a:extLst>
+          </p:cNvPr>
+          <p:cNvSpPr txBox="1"/>
+          <p:nvPr/>
+        </p:nvSpPr>
+        <p:spPr>
+          <a:xfrm>
+            <a:off x="3734929" y="3200869"/>
+            <a:ext cx="576656" cy="307777"/>
+          </a:xfrm>
+          <a:prstGeom prst="rect">
+            <a:avLst/>
+          </a:prstGeom>
+          <a:noFill/>
+        </p:spPr>
+        <p:txBody>
+          <a:bodyPr wrap="square" rtlCol="0">
+            <a:spAutoFit/>
+          </a:bodyPr>
+          <a:lstStyle/>
+          <a:p>
+            <a:pPr algn="ctr"/>
+            <a:r>
+              <a:rPr lang="en-US" sz="1400" b="1" dirty="0"/>
+              <a:t>Suzy</a:t>
+            </a:r>
+          </a:p>
+        </p:txBody>
+      </p:sp>
+      <p:sp>
+        <p:nvSpPr>
+          <p:cNvPr id="63" name="Rectangle 62">
+            <a:extLst>
+              <a:ext uri="{FF2B5EF4-FFF2-40B4-BE49-F238E27FC236}">
+                <a16:creationId xmlns:a16="http://schemas.microsoft.com/office/drawing/2014/main" id="{EFB03B51-BCBC-918F-444D-E60B834418D4}"/>
               </a:ext>
             </a:extLst>
           </p:cNvPr>
@@ -4309,7 +4407,7 @@
         </p:nvSpPr>
         <p:spPr>
           <a:xfrm>
-            <a:off x="1970269" y="2432022"/>
+            <a:off x="7095001" y="4460019"/>
             <a:ext cx="2411896" cy="1895060"/>
           </a:xfrm>
           <a:prstGeom prst="rect">
@@ -4347,12 +4445,73 @@
           </a:p>
         </p:txBody>
       </p:sp>
-      <p:sp>
-        <p:nvSpPr>
-          <p:cNvPr id="39" name="TextBox 38">
-            <a:extLst>
-              <a:ext uri="{FF2B5EF4-FFF2-40B4-BE49-F238E27FC236}">
-                <a16:creationId xmlns:a16="http://schemas.microsoft.com/office/drawing/2014/main" id="{0CF44CC8-69B9-37C9-D777-525736851D2E}"/>
+      <p:pic>
+        <p:nvPicPr>
+          <p:cNvPr id="40" name="Picture 39">
+            <a:extLst>
+              <a:ext uri="{FF2B5EF4-FFF2-40B4-BE49-F238E27FC236}">
+                <a16:creationId xmlns:a16="http://schemas.microsoft.com/office/drawing/2014/main" id="{03C493E9-8202-9C08-840B-5EAD8B4BFE2D}"/>
+              </a:ext>
+            </a:extLst>
+          </p:cNvPr>
+          <p:cNvPicPr>
+            <a:picLocks noChangeAspect="1"/>
+          </p:cNvPicPr>
+          <p:nvPr/>
+        </p:nvPicPr>
+        <p:blipFill>
+          <a:blip r:embed="rId5"/>
+          <a:stretch>
+            <a:fillRect/>
+          </a:stretch>
+        </p:blipFill>
+        <p:spPr>
+          <a:xfrm>
+            <a:off x="2647205" y="477276"/>
+            <a:ext cx="1109868" cy="1413760"/>
+          </a:xfrm>
+          <a:prstGeom prst="rect">
+            <a:avLst/>
+          </a:prstGeom>
+        </p:spPr>
+      </p:pic>
+      <p:pic>
+        <p:nvPicPr>
+          <p:cNvPr id="2" name="Picture 1">
+            <a:extLst>
+              <a:ext uri="{FF2B5EF4-FFF2-40B4-BE49-F238E27FC236}">
+                <a16:creationId xmlns:a16="http://schemas.microsoft.com/office/drawing/2014/main" id="{C9C7235B-CB8B-1806-1C58-5D062ED22426}"/>
+              </a:ext>
+            </a:extLst>
+          </p:cNvPr>
+          <p:cNvPicPr>
+            <a:picLocks noChangeAspect="1"/>
+          </p:cNvPicPr>
+          <p:nvPr/>
+        </p:nvPicPr>
+        <p:blipFill>
+          <a:blip r:embed="rId3"/>
+          <a:srcRect l="18006" t="34092" b="1"/>
+          <a:stretch>
+            <a:fillRect/>
+          </a:stretch>
+        </p:blipFill>
+        <p:spPr>
+          <a:xfrm>
+            <a:off x="2091997" y="3386465"/>
+            <a:ext cx="842433" cy="424417"/>
+          </a:xfrm>
+          <a:prstGeom prst="rect">
+            <a:avLst/>
+          </a:prstGeom>
+        </p:spPr>
+      </p:pic>
+      <p:sp>
+        <p:nvSpPr>
+          <p:cNvPr id="38" name="TextBox 37">
+            <a:extLst>
+              <a:ext uri="{FF2B5EF4-FFF2-40B4-BE49-F238E27FC236}">
+                <a16:creationId xmlns:a16="http://schemas.microsoft.com/office/drawing/2014/main" id="{78C74243-831A-5B84-6F74-0BEDE7CB3400}"/>
               </a:ext>
             </a:extLst>
           </p:cNvPr>
@@ -4361,8 +4520,8 @@
         </p:nvSpPr>
         <p:spPr>
           <a:xfrm>
-            <a:off x="3734929" y="3200869"/>
-            <a:ext cx="576656" cy="307777"/>
+            <a:off x="2003605" y="3200869"/>
+            <a:ext cx="612601" cy="307777"/>
           </a:xfrm>
           <a:prstGeom prst="rect">
             <a:avLst/>
@@ -4378,17 +4537,898 @@
             <a:pPr algn="ctr"/>
             <a:r>
               <a:rPr lang="en-US" sz="1400" b="1" dirty="0"/>
+              <a:t>Andy</a:t>
+            </a:r>
+          </a:p>
+        </p:txBody>
+      </p:sp>
+      <p:pic>
+        <p:nvPicPr>
+          <p:cNvPr id="5" name="Picture 4">
+            <a:extLst>
+              <a:ext uri="{FF2B5EF4-FFF2-40B4-BE49-F238E27FC236}">
+                <a16:creationId xmlns:a16="http://schemas.microsoft.com/office/drawing/2014/main" id="{8B7DEF7A-CFC2-8B41-CBD6-C152897851E9}"/>
+              </a:ext>
+            </a:extLst>
+          </p:cNvPr>
+          <p:cNvPicPr>
+            <a:picLocks noChangeAspect="1"/>
+          </p:cNvPicPr>
+          <p:nvPr/>
+        </p:nvPicPr>
+        <p:blipFill>
+          <a:blip r:embed="rId3"/>
+          <a:srcRect l="18006" t="34092" b="1"/>
+          <a:stretch>
+            <a:fillRect/>
+          </a:stretch>
+        </p:blipFill>
+        <p:spPr>
+          <a:xfrm flipH="1">
+            <a:off x="3428947" y="3379552"/>
+            <a:ext cx="842433" cy="424417"/>
+          </a:xfrm>
+          <a:prstGeom prst="rect">
+            <a:avLst/>
+          </a:prstGeom>
+        </p:spPr>
+      </p:pic>
+      <p:sp>
+        <p:nvSpPr>
+          <p:cNvPr id="6" name="TextBox 5">
+            <a:extLst>
+              <a:ext uri="{FF2B5EF4-FFF2-40B4-BE49-F238E27FC236}">
+                <a16:creationId xmlns:a16="http://schemas.microsoft.com/office/drawing/2014/main" id="{F26121D4-9D1C-E4BD-E0D4-82C8018C03AE}"/>
+              </a:ext>
+            </a:extLst>
+          </p:cNvPr>
+          <p:cNvSpPr txBox="1"/>
+          <p:nvPr/>
+        </p:nvSpPr>
+        <p:spPr>
+          <a:xfrm>
+            <a:off x="6364240" y="3191905"/>
+            <a:ext cx="576656" cy="307777"/>
+          </a:xfrm>
+          <a:prstGeom prst="rect">
+            <a:avLst/>
+          </a:prstGeom>
+          <a:noFill/>
+        </p:spPr>
+        <p:txBody>
+          <a:bodyPr wrap="square" rtlCol="0">
+            <a:spAutoFit/>
+          </a:bodyPr>
+          <a:lstStyle/>
+          <a:p>
+            <a:pPr algn="ctr"/>
+            <a:r>
+              <a:rPr lang="en-US" sz="1400" b="1" dirty="0"/>
               <a:t>Suzy</a:t>
             </a:r>
           </a:p>
         </p:txBody>
       </p:sp>
-      <p:sp>
-        <p:nvSpPr>
-          <p:cNvPr id="63" name="Rectangle 62">
-            <a:extLst>
-              <a:ext uri="{FF2B5EF4-FFF2-40B4-BE49-F238E27FC236}">
-                <a16:creationId xmlns:a16="http://schemas.microsoft.com/office/drawing/2014/main" id="{EFB03B51-BCBC-918F-444D-E60B834418D4}"/>
+      <p:pic>
+        <p:nvPicPr>
+          <p:cNvPr id="7" name="Picture 6">
+            <a:extLst>
+              <a:ext uri="{FF2B5EF4-FFF2-40B4-BE49-F238E27FC236}">
+                <a16:creationId xmlns:a16="http://schemas.microsoft.com/office/drawing/2014/main" id="{D9A43A30-61FC-E2FB-6B86-D8C393C98026}"/>
+              </a:ext>
+            </a:extLst>
+          </p:cNvPr>
+          <p:cNvPicPr>
+            <a:picLocks noChangeAspect="1"/>
+          </p:cNvPicPr>
+          <p:nvPr/>
+        </p:nvPicPr>
+        <p:blipFill>
+          <a:blip r:embed="rId3"/>
+          <a:srcRect l="18006" t="34092" b="1"/>
+          <a:stretch>
+            <a:fillRect/>
+          </a:stretch>
+        </p:blipFill>
+        <p:spPr>
+          <a:xfrm>
+            <a:off x="4664863" y="3377501"/>
+            <a:ext cx="842433" cy="424417"/>
+          </a:xfrm>
+          <a:prstGeom prst="rect">
+            <a:avLst/>
+          </a:prstGeom>
+        </p:spPr>
+      </p:pic>
+      <p:sp>
+        <p:nvSpPr>
+          <p:cNvPr id="8" name="TextBox 7">
+            <a:extLst>
+              <a:ext uri="{FF2B5EF4-FFF2-40B4-BE49-F238E27FC236}">
+                <a16:creationId xmlns:a16="http://schemas.microsoft.com/office/drawing/2014/main" id="{FD460AA7-654B-10B0-F712-719046E2F079}"/>
+              </a:ext>
+            </a:extLst>
+          </p:cNvPr>
+          <p:cNvSpPr txBox="1"/>
+          <p:nvPr/>
+        </p:nvSpPr>
+        <p:spPr>
+          <a:xfrm>
+            <a:off x="4576471" y="3191905"/>
+            <a:ext cx="612601" cy="307777"/>
+          </a:xfrm>
+          <a:prstGeom prst="rect">
+            <a:avLst/>
+          </a:prstGeom>
+          <a:noFill/>
+        </p:spPr>
+        <p:txBody>
+          <a:bodyPr wrap="square" rtlCol="0">
+            <a:spAutoFit/>
+          </a:bodyPr>
+          <a:lstStyle/>
+          <a:p>
+            <a:pPr algn="ctr"/>
+            <a:r>
+              <a:rPr lang="en-US" sz="1400" b="1" dirty="0"/>
+              <a:t>Andy</a:t>
+            </a:r>
+          </a:p>
+        </p:txBody>
+      </p:sp>
+      <p:pic>
+        <p:nvPicPr>
+          <p:cNvPr id="10" name="Picture 9">
+            <a:extLst>
+              <a:ext uri="{FF2B5EF4-FFF2-40B4-BE49-F238E27FC236}">
+                <a16:creationId xmlns:a16="http://schemas.microsoft.com/office/drawing/2014/main" id="{858B4A84-D622-53EF-6452-C8A4908FD173}"/>
+              </a:ext>
+            </a:extLst>
+          </p:cNvPr>
+          <p:cNvPicPr>
+            <a:picLocks noChangeAspect="1"/>
+          </p:cNvPicPr>
+          <p:nvPr/>
+        </p:nvPicPr>
+        <p:blipFill>
+          <a:blip r:embed="rId3"/>
+          <a:srcRect l="18006" t="34092" b="1"/>
+          <a:stretch>
+            <a:fillRect/>
+          </a:stretch>
+        </p:blipFill>
+        <p:spPr>
+          <a:xfrm flipH="1">
+            <a:off x="6015260" y="3370588"/>
+            <a:ext cx="842433" cy="424417"/>
+          </a:xfrm>
+          <a:prstGeom prst="rect">
+            <a:avLst/>
+          </a:prstGeom>
+        </p:spPr>
+      </p:pic>
+      <p:sp>
+        <p:nvSpPr>
+          <p:cNvPr id="11" name="TextBox 10">
+            <a:extLst>
+              <a:ext uri="{FF2B5EF4-FFF2-40B4-BE49-F238E27FC236}">
+                <a16:creationId xmlns:a16="http://schemas.microsoft.com/office/drawing/2014/main" id="{F1CDD45A-CEB7-A12D-1E76-4BB8AA534A55}"/>
+              </a:ext>
+            </a:extLst>
+          </p:cNvPr>
+          <p:cNvSpPr txBox="1"/>
+          <p:nvPr/>
+        </p:nvSpPr>
+        <p:spPr>
+          <a:xfrm>
+            <a:off x="8896764" y="3182941"/>
+            <a:ext cx="576656" cy="307777"/>
+          </a:xfrm>
+          <a:prstGeom prst="rect">
+            <a:avLst/>
+          </a:prstGeom>
+          <a:noFill/>
+        </p:spPr>
+        <p:txBody>
+          <a:bodyPr wrap="square" rtlCol="0">
+            <a:spAutoFit/>
+          </a:bodyPr>
+          <a:lstStyle/>
+          <a:p>
+            <a:pPr algn="ctr"/>
+            <a:r>
+              <a:rPr lang="en-US" sz="1400" b="1" dirty="0"/>
+              <a:t>Suzy</a:t>
+            </a:r>
+          </a:p>
+        </p:txBody>
+      </p:sp>
+      <p:sp>
+        <p:nvSpPr>
+          <p:cNvPr id="13" name="TextBox 12">
+            <a:extLst>
+              <a:ext uri="{FF2B5EF4-FFF2-40B4-BE49-F238E27FC236}">
+                <a16:creationId xmlns:a16="http://schemas.microsoft.com/office/drawing/2014/main" id="{0CB1CFE9-1014-21F1-137C-77D1D232B5DF}"/>
+              </a:ext>
+            </a:extLst>
+          </p:cNvPr>
+          <p:cNvSpPr txBox="1"/>
+          <p:nvPr/>
+        </p:nvSpPr>
+        <p:spPr>
+          <a:xfrm>
+            <a:off x="7108995" y="3182941"/>
+            <a:ext cx="612601" cy="307777"/>
+          </a:xfrm>
+          <a:prstGeom prst="rect">
+            <a:avLst/>
+          </a:prstGeom>
+          <a:noFill/>
+        </p:spPr>
+        <p:txBody>
+          <a:bodyPr wrap="square" rtlCol="0">
+            <a:spAutoFit/>
+          </a:bodyPr>
+          <a:lstStyle/>
+          <a:p>
+            <a:pPr algn="ctr"/>
+            <a:r>
+              <a:rPr lang="en-US" sz="1400" b="1" dirty="0"/>
+              <a:t>Andy</a:t>
+            </a:r>
+          </a:p>
+        </p:txBody>
+      </p:sp>
+      <p:sp>
+        <p:nvSpPr>
+          <p:cNvPr id="28" name="TextBox 27">
+            <a:extLst>
+              <a:ext uri="{FF2B5EF4-FFF2-40B4-BE49-F238E27FC236}">
+                <a16:creationId xmlns:a16="http://schemas.microsoft.com/office/drawing/2014/main" id="{E04696BA-5745-650E-1D03-8AEA9684D576}"/>
+              </a:ext>
+            </a:extLst>
+          </p:cNvPr>
+          <p:cNvSpPr txBox="1"/>
+          <p:nvPr/>
+        </p:nvSpPr>
+        <p:spPr>
+          <a:xfrm>
+            <a:off x="8908055" y="5226887"/>
+            <a:ext cx="576656" cy="307777"/>
+          </a:xfrm>
+          <a:prstGeom prst="rect">
+            <a:avLst/>
+          </a:prstGeom>
+          <a:noFill/>
+        </p:spPr>
+        <p:txBody>
+          <a:bodyPr wrap="square" rtlCol="0">
+            <a:spAutoFit/>
+          </a:bodyPr>
+          <a:lstStyle/>
+          <a:p>
+            <a:pPr algn="ctr"/>
+            <a:r>
+              <a:rPr lang="en-US" sz="1400" b="1" dirty="0"/>
+              <a:t>Suzy</a:t>
+            </a:r>
+          </a:p>
+        </p:txBody>
+      </p:sp>
+      <p:pic>
+        <p:nvPicPr>
+          <p:cNvPr id="29" name="Picture 28">
+            <a:extLst>
+              <a:ext uri="{FF2B5EF4-FFF2-40B4-BE49-F238E27FC236}">
+                <a16:creationId xmlns:a16="http://schemas.microsoft.com/office/drawing/2014/main" id="{941EE7EC-93BC-0BB4-85DC-992A4DDE40C7}"/>
+              </a:ext>
+            </a:extLst>
+          </p:cNvPr>
+          <p:cNvPicPr>
+            <a:picLocks noChangeAspect="1"/>
+          </p:cNvPicPr>
+          <p:nvPr/>
+        </p:nvPicPr>
+        <p:blipFill>
+          <a:blip r:embed="rId3"/>
+          <a:srcRect l="18006" t="34092" b="1"/>
+          <a:stretch>
+            <a:fillRect/>
+          </a:stretch>
+        </p:blipFill>
+        <p:spPr>
+          <a:xfrm>
+            <a:off x="7197389" y="5412483"/>
+            <a:ext cx="842433" cy="424417"/>
+          </a:xfrm>
+          <a:prstGeom prst="rect">
+            <a:avLst/>
+          </a:prstGeom>
+        </p:spPr>
+      </p:pic>
+      <p:sp>
+        <p:nvSpPr>
+          <p:cNvPr id="33" name="TextBox 32">
+            <a:extLst>
+              <a:ext uri="{FF2B5EF4-FFF2-40B4-BE49-F238E27FC236}">
+                <a16:creationId xmlns:a16="http://schemas.microsoft.com/office/drawing/2014/main" id="{3DE391CD-7151-5A3F-F344-FC0EEF4F4CD1}"/>
+              </a:ext>
+            </a:extLst>
+          </p:cNvPr>
+          <p:cNvSpPr txBox="1"/>
+          <p:nvPr/>
+        </p:nvSpPr>
+        <p:spPr>
+          <a:xfrm>
+            <a:off x="7108997" y="5226887"/>
+            <a:ext cx="612601" cy="307777"/>
+          </a:xfrm>
+          <a:prstGeom prst="rect">
+            <a:avLst/>
+          </a:prstGeom>
+          <a:noFill/>
+        </p:spPr>
+        <p:txBody>
+          <a:bodyPr wrap="square" rtlCol="0">
+            <a:spAutoFit/>
+          </a:bodyPr>
+          <a:lstStyle/>
+          <a:p>
+            <a:pPr algn="ctr"/>
+            <a:r>
+              <a:rPr lang="en-US" sz="1400" b="1" dirty="0"/>
+              <a:t>Andy</a:t>
+            </a:r>
+          </a:p>
+        </p:txBody>
+      </p:sp>
+      <p:pic>
+        <p:nvPicPr>
+          <p:cNvPr id="34" name="Picture 33">
+            <a:extLst>
+              <a:ext uri="{FF2B5EF4-FFF2-40B4-BE49-F238E27FC236}">
+                <a16:creationId xmlns:a16="http://schemas.microsoft.com/office/drawing/2014/main" id="{34B2D670-3972-A7B7-ECDC-E5EF3F8BCF9B}"/>
+              </a:ext>
+            </a:extLst>
+          </p:cNvPr>
+          <p:cNvPicPr>
+            <a:picLocks noChangeAspect="1"/>
+          </p:cNvPicPr>
+          <p:nvPr/>
+        </p:nvPicPr>
+        <p:blipFill>
+          <a:blip r:embed="rId3"/>
+          <a:srcRect l="18006" t="34092" b="1"/>
+          <a:stretch>
+            <a:fillRect/>
+          </a:stretch>
+        </p:blipFill>
+        <p:spPr>
+          <a:xfrm flipH="1">
+            <a:off x="8547786" y="5405570"/>
+            <a:ext cx="842433" cy="424417"/>
+          </a:xfrm>
+          <a:prstGeom prst="rect">
+            <a:avLst/>
+          </a:prstGeom>
+        </p:spPr>
+      </p:pic>
+      <p:pic>
+        <p:nvPicPr>
+          <p:cNvPr id="4" name="Picture 3">
+            <a:extLst>
+              <a:ext uri="{FF2B5EF4-FFF2-40B4-BE49-F238E27FC236}">
+                <a16:creationId xmlns:a16="http://schemas.microsoft.com/office/drawing/2014/main" id="{71290097-0285-CA5C-5C95-9668BF8FD90D}"/>
+              </a:ext>
+            </a:extLst>
+          </p:cNvPr>
+          <p:cNvPicPr>
+            <a:picLocks noChangeAspect="1"/>
+          </p:cNvPicPr>
+          <p:nvPr/>
+        </p:nvPicPr>
+        <p:blipFill>
+          <a:blip r:embed="rId6"/>
+          <a:stretch>
+            <a:fillRect/>
+          </a:stretch>
+        </p:blipFill>
+        <p:spPr>
+          <a:xfrm>
+            <a:off x="2553067" y="574532"/>
+            <a:ext cx="365760" cy="365760"/>
+          </a:xfrm>
+          <a:prstGeom prst="rect">
+            <a:avLst/>
+          </a:prstGeom>
+        </p:spPr>
+      </p:pic>
+      <p:pic>
+        <p:nvPicPr>
+          <p:cNvPr id="15" name="Picture 14">
+            <a:extLst>
+              <a:ext uri="{FF2B5EF4-FFF2-40B4-BE49-F238E27FC236}">
+                <a16:creationId xmlns:a16="http://schemas.microsoft.com/office/drawing/2014/main" id="{AED5F787-DE4D-7541-52D5-2836942083E1}"/>
+              </a:ext>
+            </a:extLst>
+          </p:cNvPr>
+          <p:cNvPicPr>
+            <a:picLocks noChangeAspect="1"/>
+          </p:cNvPicPr>
+          <p:nvPr/>
+        </p:nvPicPr>
+        <p:blipFill>
+          <a:blip r:embed="rId7"/>
+          <a:stretch>
+            <a:fillRect/>
+          </a:stretch>
+        </p:blipFill>
+        <p:spPr>
+          <a:xfrm>
+            <a:off x="3580344" y="717914"/>
+            <a:ext cx="182880" cy="236338"/>
+          </a:xfrm>
+          <a:prstGeom prst="rect">
+            <a:avLst/>
+          </a:prstGeom>
+        </p:spPr>
+      </p:pic>
+      <p:pic>
+        <p:nvPicPr>
+          <p:cNvPr id="19" name="Picture 18">
+            <a:extLst>
+              <a:ext uri="{FF2B5EF4-FFF2-40B4-BE49-F238E27FC236}">
+                <a16:creationId xmlns:a16="http://schemas.microsoft.com/office/drawing/2014/main" id="{C8247903-D3AB-6426-E6C1-DB547B62A5A3}"/>
+              </a:ext>
+            </a:extLst>
+          </p:cNvPr>
+          <p:cNvPicPr>
+            <a:picLocks noChangeAspect="1"/>
+          </p:cNvPicPr>
+          <p:nvPr/>
+        </p:nvPicPr>
+        <p:blipFill>
+          <a:blip r:embed="rId6"/>
+          <a:stretch>
+            <a:fillRect/>
+          </a:stretch>
+        </p:blipFill>
+        <p:spPr>
+          <a:xfrm>
+            <a:off x="2558710" y="3142756"/>
+            <a:ext cx="365760" cy="365760"/>
+          </a:xfrm>
+          <a:prstGeom prst="rect">
+            <a:avLst/>
+          </a:prstGeom>
+        </p:spPr>
+      </p:pic>
+      <p:pic>
+        <p:nvPicPr>
+          <p:cNvPr id="20" name="Picture 19">
+            <a:extLst>
+              <a:ext uri="{FF2B5EF4-FFF2-40B4-BE49-F238E27FC236}">
+                <a16:creationId xmlns:a16="http://schemas.microsoft.com/office/drawing/2014/main" id="{B06AA3EA-2102-A148-DAE6-9AFE20974545}"/>
+              </a:ext>
+            </a:extLst>
+          </p:cNvPr>
+          <p:cNvPicPr>
+            <a:picLocks noChangeAspect="1"/>
+          </p:cNvPicPr>
+          <p:nvPr/>
+        </p:nvPicPr>
+        <p:blipFill>
+          <a:blip r:embed="rId7"/>
+          <a:stretch>
+            <a:fillRect/>
+          </a:stretch>
+        </p:blipFill>
+        <p:spPr>
+          <a:xfrm>
+            <a:off x="3585987" y="3286138"/>
+            <a:ext cx="182880" cy="236338"/>
+          </a:xfrm>
+          <a:prstGeom prst="rect">
+            <a:avLst/>
+          </a:prstGeom>
+        </p:spPr>
+      </p:pic>
+      <p:pic>
+        <p:nvPicPr>
+          <p:cNvPr id="21" name="Picture 20">
+            <a:extLst>
+              <a:ext uri="{FF2B5EF4-FFF2-40B4-BE49-F238E27FC236}">
+                <a16:creationId xmlns:a16="http://schemas.microsoft.com/office/drawing/2014/main" id="{B2925415-2D86-3721-741E-4AEA04633524}"/>
+              </a:ext>
+            </a:extLst>
+          </p:cNvPr>
+          <p:cNvPicPr>
+            <a:picLocks noChangeAspect="1"/>
+          </p:cNvPicPr>
+          <p:nvPr/>
+        </p:nvPicPr>
+        <p:blipFill>
+          <a:blip r:embed="rId8"/>
+          <a:stretch>
+            <a:fillRect/>
+          </a:stretch>
+        </p:blipFill>
+        <p:spPr>
+          <a:xfrm>
+            <a:off x="4935039" y="1768043"/>
+            <a:ext cx="640080" cy="443790"/>
+          </a:xfrm>
+          <a:prstGeom prst="rect">
+            <a:avLst/>
+          </a:prstGeom>
+        </p:spPr>
+      </p:pic>
+      <p:pic>
+        <p:nvPicPr>
+          <p:cNvPr id="22" name="Picture 21">
+            <a:extLst>
+              <a:ext uri="{FF2B5EF4-FFF2-40B4-BE49-F238E27FC236}">
+                <a16:creationId xmlns:a16="http://schemas.microsoft.com/office/drawing/2014/main" id="{6146F422-D7E2-A75D-AEC1-12339F632378}"/>
+              </a:ext>
+            </a:extLst>
+          </p:cNvPr>
+          <p:cNvPicPr>
+            <a:picLocks noChangeAspect="1"/>
+          </p:cNvPicPr>
+          <p:nvPr/>
+        </p:nvPicPr>
+        <p:blipFill>
+          <a:blip r:embed="rId8"/>
+          <a:stretch>
+            <a:fillRect/>
+          </a:stretch>
+        </p:blipFill>
+        <p:spPr>
+          <a:xfrm>
+            <a:off x="4918104" y="3760534"/>
+            <a:ext cx="640080" cy="443790"/>
+          </a:xfrm>
+          <a:prstGeom prst="rect">
+            <a:avLst/>
+          </a:prstGeom>
+        </p:spPr>
+      </p:pic>
+      <p:pic>
+        <p:nvPicPr>
+          <p:cNvPr id="25" name="Picture 24">
+            <a:extLst>
+              <a:ext uri="{FF2B5EF4-FFF2-40B4-BE49-F238E27FC236}">
+                <a16:creationId xmlns:a16="http://schemas.microsoft.com/office/drawing/2014/main" id="{E8C1665B-FD32-C5AC-466D-D33D0EEAC95B}"/>
+              </a:ext>
+            </a:extLst>
+          </p:cNvPr>
+          <p:cNvPicPr>
+            <a:picLocks noChangeAspect="1"/>
+          </p:cNvPicPr>
+          <p:nvPr/>
+        </p:nvPicPr>
+        <p:blipFill>
+          <a:blip r:embed="rId6"/>
+          <a:stretch>
+            <a:fillRect/>
+          </a:stretch>
+        </p:blipFill>
+        <p:spPr>
+          <a:xfrm>
+            <a:off x="5102961" y="589311"/>
+            <a:ext cx="365760" cy="365760"/>
+          </a:xfrm>
+          <a:prstGeom prst="rect">
+            <a:avLst/>
+          </a:prstGeom>
+        </p:spPr>
+      </p:pic>
+      <p:pic>
+        <p:nvPicPr>
+          <p:cNvPr id="26" name="Picture 25">
+            <a:extLst>
+              <a:ext uri="{FF2B5EF4-FFF2-40B4-BE49-F238E27FC236}">
+                <a16:creationId xmlns:a16="http://schemas.microsoft.com/office/drawing/2014/main" id="{02769775-1057-14B0-68AC-A8E522EEC287}"/>
+              </a:ext>
+            </a:extLst>
+          </p:cNvPr>
+          <p:cNvPicPr>
+            <a:picLocks noChangeAspect="1"/>
+          </p:cNvPicPr>
+          <p:nvPr/>
+        </p:nvPicPr>
+        <p:blipFill>
+          <a:blip r:embed="rId6"/>
+          <a:stretch>
+            <a:fillRect/>
+          </a:stretch>
+        </p:blipFill>
+        <p:spPr>
+          <a:xfrm>
+            <a:off x="6046430" y="585812"/>
+            <a:ext cx="365760" cy="365760"/>
+          </a:xfrm>
+          <a:prstGeom prst="rect">
+            <a:avLst/>
+          </a:prstGeom>
+        </p:spPr>
+      </p:pic>
+      <p:pic>
+        <p:nvPicPr>
+          <p:cNvPr id="27" name="Picture 26">
+            <a:extLst>
+              <a:ext uri="{FF2B5EF4-FFF2-40B4-BE49-F238E27FC236}">
+                <a16:creationId xmlns:a16="http://schemas.microsoft.com/office/drawing/2014/main" id="{62C408A4-1D67-5161-DBA8-95C92FFFFEF0}"/>
+              </a:ext>
+            </a:extLst>
+          </p:cNvPr>
+          <p:cNvPicPr>
+            <a:picLocks noChangeAspect="1"/>
+          </p:cNvPicPr>
+          <p:nvPr/>
+        </p:nvPicPr>
+        <p:blipFill>
+          <a:blip r:embed="rId6"/>
+          <a:stretch>
+            <a:fillRect/>
+          </a:stretch>
+        </p:blipFill>
+        <p:spPr>
+          <a:xfrm>
+            <a:off x="5130680" y="3146255"/>
+            <a:ext cx="365760" cy="365760"/>
+          </a:xfrm>
+          <a:prstGeom prst="rect">
+            <a:avLst/>
+          </a:prstGeom>
+        </p:spPr>
+      </p:pic>
+      <p:pic>
+        <p:nvPicPr>
+          <p:cNvPr id="36" name="Picture 35">
+            <a:extLst>
+              <a:ext uri="{FF2B5EF4-FFF2-40B4-BE49-F238E27FC236}">
+                <a16:creationId xmlns:a16="http://schemas.microsoft.com/office/drawing/2014/main" id="{850C70B5-D429-C34C-58D3-1919C800ABF1}"/>
+              </a:ext>
+            </a:extLst>
+          </p:cNvPr>
+          <p:cNvPicPr>
+            <a:picLocks noChangeAspect="1"/>
+          </p:cNvPicPr>
+          <p:nvPr/>
+        </p:nvPicPr>
+        <p:blipFill>
+          <a:blip r:embed="rId6"/>
+          <a:stretch>
+            <a:fillRect/>
+          </a:stretch>
+        </p:blipFill>
+        <p:spPr>
+          <a:xfrm>
+            <a:off x="6074149" y="3142756"/>
+            <a:ext cx="365760" cy="365760"/>
+          </a:xfrm>
+          <a:prstGeom prst="rect">
+            <a:avLst/>
+          </a:prstGeom>
+        </p:spPr>
+      </p:pic>
+      <p:pic>
+        <p:nvPicPr>
+          <p:cNvPr id="37" name="Picture 36">
+            <a:extLst>
+              <a:ext uri="{FF2B5EF4-FFF2-40B4-BE49-F238E27FC236}">
+                <a16:creationId xmlns:a16="http://schemas.microsoft.com/office/drawing/2014/main" id="{DC5FC9C8-8226-C729-5B1D-C0575FF67B0E}"/>
+              </a:ext>
+            </a:extLst>
+          </p:cNvPr>
+          <p:cNvPicPr>
+            <a:picLocks noChangeAspect="1"/>
+          </p:cNvPicPr>
+          <p:nvPr/>
+        </p:nvPicPr>
+        <p:blipFill>
+          <a:blip r:embed="rId6"/>
+          <a:stretch>
+            <a:fillRect/>
+          </a:stretch>
+        </p:blipFill>
+        <p:spPr>
+          <a:xfrm>
+            <a:off x="7661120" y="572852"/>
+            <a:ext cx="365760" cy="365760"/>
+          </a:xfrm>
+          <a:prstGeom prst="rect">
+            <a:avLst/>
+          </a:prstGeom>
+        </p:spPr>
+      </p:pic>
+      <p:pic>
+        <p:nvPicPr>
+          <p:cNvPr id="41" name="Picture 40">
+            <a:extLst>
+              <a:ext uri="{FF2B5EF4-FFF2-40B4-BE49-F238E27FC236}">
+                <a16:creationId xmlns:a16="http://schemas.microsoft.com/office/drawing/2014/main" id="{4D512D05-F516-A376-386D-193C26D3F79A}"/>
+              </a:ext>
+            </a:extLst>
+          </p:cNvPr>
+          <p:cNvPicPr>
+            <a:picLocks noChangeAspect="1"/>
+          </p:cNvPicPr>
+          <p:nvPr/>
+        </p:nvPicPr>
+        <p:blipFill>
+          <a:blip r:embed="rId6"/>
+          <a:stretch>
+            <a:fillRect/>
+          </a:stretch>
+        </p:blipFill>
+        <p:spPr>
+          <a:xfrm>
+            <a:off x="8604589" y="569353"/>
+            <a:ext cx="365760" cy="365760"/>
+          </a:xfrm>
+          <a:prstGeom prst="rect">
+            <a:avLst/>
+          </a:prstGeom>
+        </p:spPr>
+      </p:pic>
+      <p:pic>
+        <p:nvPicPr>
+          <p:cNvPr id="42" name="Picture 41">
+            <a:extLst>
+              <a:ext uri="{FF2B5EF4-FFF2-40B4-BE49-F238E27FC236}">
+                <a16:creationId xmlns:a16="http://schemas.microsoft.com/office/drawing/2014/main" id="{2DCD7E36-D946-3009-44B4-25172372A080}"/>
+              </a:ext>
+            </a:extLst>
+          </p:cNvPr>
+          <p:cNvPicPr>
+            <a:picLocks noChangeAspect="1"/>
+          </p:cNvPicPr>
+          <p:nvPr/>
+        </p:nvPicPr>
+        <p:blipFill>
+          <a:blip r:embed="rId6"/>
+          <a:stretch>
+            <a:fillRect/>
+          </a:stretch>
+        </p:blipFill>
+        <p:spPr>
+          <a:xfrm>
+            <a:off x="7677092" y="3141057"/>
+            <a:ext cx="365760" cy="365760"/>
+          </a:xfrm>
+          <a:prstGeom prst="rect">
+            <a:avLst/>
+          </a:prstGeom>
+        </p:spPr>
+      </p:pic>
+      <p:pic>
+        <p:nvPicPr>
+          <p:cNvPr id="43" name="Picture 42">
+            <a:extLst>
+              <a:ext uri="{FF2B5EF4-FFF2-40B4-BE49-F238E27FC236}">
+                <a16:creationId xmlns:a16="http://schemas.microsoft.com/office/drawing/2014/main" id="{D4B83FEE-F757-721B-08AB-D56C816D3C38}"/>
+              </a:ext>
+            </a:extLst>
+          </p:cNvPr>
+          <p:cNvPicPr>
+            <a:picLocks noChangeAspect="1"/>
+          </p:cNvPicPr>
+          <p:nvPr/>
+        </p:nvPicPr>
+        <p:blipFill>
+          <a:blip r:embed="rId6"/>
+          <a:stretch>
+            <a:fillRect/>
+          </a:stretch>
+        </p:blipFill>
+        <p:spPr>
+          <a:xfrm>
+            <a:off x="8620561" y="3137558"/>
+            <a:ext cx="365760" cy="365760"/>
+          </a:xfrm>
+          <a:prstGeom prst="rect">
+            <a:avLst/>
+          </a:prstGeom>
+        </p:spPr>
+      </p:pic>
+      <p:pic>
+        <p:nvPicPr>
+          <p:cNvPr id="46" name="Picture 45">
+            <a:extLst>
+              <a:ext uri="{FF2B5EF4-FFF2-40B4-BE49-F238E27FC236}">
+                <a16:creationId xmlns:a16="http://schemas.microsoft.com/office/drawing/2014/main" id="{18296C6E-935D-E835-6F53-34F9FB9A2730}"/>
+              </a:ext>
+            </a:extLst>
+          </p:cNvPr>
+          <p:cNvPicPr>
+            <a:picLocks noChangeAspect="1"/>
+          </p:cNvPicPr>
+          <p:nvPr/>
+        </p:nvPicPr>
+        <p:blipFill>
+          <a:blip r:embed="rId6"/>
+          <a:stretch>
+            <a:fillRect/>
+          </a:stretch>
+        </p:blipFill>
+        <p:spPr>
+          <a:xfrm>
+            <a:off x="7698658" y="5190131"/>
+            <a:ext cx="365760" cy="365760"/>
+          </a:xfrm>
+          <a:prstGeom prst="rect">
+            <a:avLst/>
+          </a:prstGeom>
+        </p:spPr>
+      </p:pic>
+      <p:pic>
+        <p:nvPicPr>
+          <p:cNvPr id="47" name="Picture 46">
+            <a:extLst>
+              <a:ext uri="{FF2B5EF4-FFF2-40B4-BE49-F238E27FC236}">
+                <a16:creationId xmlns:a16="http://schemas.microsoft.com/office/drawing/2014/main" id="{EA3F1B3A-9545-05B4-6CF6-B926A165F3E1}"/>
+              </a:ext>
+            </a:extLst>
+          </p:cNvPr>
+          <p:cNvPicPr>
+            <a:picLocks noChangeAspect="1"/>
+          </p:cNvPicPr>
+          <p:nvPr/>
+        </p:nvPicPr>
+        <p:blipFill>
+          <a:blip r:embed="rId6"/>
+          <a:stretch>
+            <a:fillRect/>
+          </a:stretch>
+        </p:blipFill>
+        <p:spPr>
+          <a:xfrm>
+            <a:off x="8642127" y="5186632"/>
+            <a:ext cx="365760" cy="365760"/>
+          </a:xfrm>
+          <a:prstGeom prst="rect">
+            <a:avLst/>
+          </a:prstGeom>
+        </p:spPr>
+      </p:pic>
+      <p:pic>
+        <p:nvPicPr>
+          <p:cNvPr id="48" name="Picture 47">
+            <a:extLst>
+              <a:ext uri="{FF2B5EF4-FFF2-40B4-BE49-F238E27FC236}">
+                <a16:creationId xmlns:a16="http://schemas.microsoft.com/office/drawing/2014/main" id="{938FBF57-37B3-241E-F9DC-C9A1325B51B0}"/>
+              </a:ext>
+            </a:extLst>
+          </p:cNvPr>
+          <p:cNvPicPr>
+            <a:picLocks noChangeAspect="1"/>
+          </p:cNvPicPr>
+          <p:nvPr/>
+        </p:nvPicPr>
+        <p:blipFill>
+          <a:blip r:embed="rId8"/>
+          <a:stretch>
+            <a:fillRect/>
+          </a:stretch>
+        </p:blipFill>
+        <p:spPr>
+          <a:xfrm>
+            <a:off x="7518745" y="5778243"/>
+            <a:ext cx="640080" cy="443790"/>
+          </a:xfrm>
+          <a:prstGeom prst="rect">
+            <a:avLst/>
+          </a:prstGeom>
+        </p:spPr>
+      </p:pic>
+      <p:sp>
+        <p:nvSpPr>
+          <p:cNvPr id="49" name="Rectangle 48">
+            <a:extLst>
+              <a:ext uri="{FF2B5EF4-FFF2-40B4-BE49-F238E27FC236}">
+                <a16:creationId xmlns:a16="http://schemas.microsoft.com/office/drawing/2014/main" id="{53E5F702-686C-6555-BB1B-E50806B61889}"/>
               </a:ext>
             </a:extLst>
           </p:cNvPr>
@@ -4397,16 +5437,18 @@
         </p:nvSpPr>
         <p:spPr>
           <a:xfrm>
-            <a:off x="7095001" y="4460019"/>
-            <a:ext cx="2411896" cy="1895060"/>
-          </a:xfrm>
-          <a:prstGeom prst="rect">
-            <a:avLst/>
-          </a:prstGeom>
-          <a:noFill/>
+            <a:off x="7197387" y="3756762"/>
+            <a:ext cx="2219588" cy="284660"/>
+          </a:xfrm>
+          <a:prstGeom prst="rect">
+            <a:avLst/>
+          </a:prstGeom>
+          <a:solidFill>
+            <a:schemeClr val="bg1"/>
+          </a:solidFill>
           <a:ln>
             <a:solidFill>
-              <a:schemeClr val="tx1"/>
+              <a:schemeClr val="bg1"/>
             </a:solidFill>
           </a:ln>
         </p:spPr>
@@ -4435,1052 +5477,12 @@
           </a:p>
         </p:txBody>
       </p:sp>
-      <p:pic>
-        <p:nvPicPr>
-          <p:cNvPr id="40" name="Picture 39">
-            <a:extLst>
-              <a:ext uri="{FF2B5EF4-FFF2-40B4-BE49-F238E27FC236}">
-                <a16:creationId xmlns:a16="http://schemas.microsoft.com/office/drawing/2014/main" id="{03C493E9-8202-9C08-840B-5EAD8B4BFE2D}"/>
-              </a:ext>
-            </a:extLst>
-          </p:cNvPr>
-          <p:cNvPicPr>
-            <a:picLocks noChangeAspect="1"/>
-          </p:cNvPicPr>
-          <p:nvPr/>
-        </p:nvPicPr>
-        <p:blipFill>
-          <a:blip r:embed="rId4"/>
-          <a:stretch>
-            <a:fillRect/>
-          </a:stretch>
-        </p:blipFill>
-        <p:spPr>
-          <a:xfrm>
-            <a:off x="2647205" y="477276"/>
-            <a:ext cx="1109868" cy="1413760"/>
-          </a:xfrm>
-          <a:prstGeom prst="rect">
-            <a:avLst/>
-          </a:prstGeom>
-        </p:spPr>
-      </p:pic>
-      <p:pic>
-        <p:nvPicPr>
-          <p:cNvPr id="2" name="Picture 1">
-            <a:extLst>
-              <a:ext uri="{FF2B5EF4-FFF2-40B4-BE49-F238E27FC236}">
-                <a16:creationId xmlns:a16="http://schemas.microsoft.com/office/drawing/2014/main" id="{C9C7235B-CB8B-1806-1C58-5D062ED22426}"/>
-              </a:ext>
-            </a:extLst>
-          </p:cNvPr>
-          <p:cNvPicPr>
-            <a:picLocks noChangeAspect="1"/>
-          </p:cNvPicPr>
-          <p:nvPr/>
-        </p:nvPicPr>
-        <p:blipFill>
-          <a:blip r:embed="rId5"/>
-          <a:srcRect l="18006" t="34092" b="1"/>
-          <a:stretch>
-            <a:fillRect/>
-          </a:stretch>
-        </p:blipFill>
-        <p:spPr>
-          <a:xfrm>
-            <a:off x="2091997" y="3386465"/>
-            <a:ext cx="842433" cy="424417"/>
-          </a:xfrm>
-          <a:prstGeom prst="rect">
-            <a:avLst/>
-          </a:prstGeom>
-        </p:spPr>
-      </p:pic>
-      <p:sp>
-        <p:nvSpPr>
-          <p:cNvPr id="38" name="TextBox 37">
-            <a:extLst>
-              <a:ext uri="{FF2B5EF4-FFF2-40B4-BE49-F238E27FC236}">
-                <a16:creationId xmlns:a16="http://schemas.microsoft.com/office/drawing/2014/main" id="{78C74243-831A-5B84-6F74-0BEDE7CB3400}"/>
-              </a:ext>
-            </a:extLst>
-          </p:cNvPr>
-          <p:cNvSpPr txBox="1"/>
-          <p:nvPr/>
-        </p:nvSpPr>
-        <p:spPr>
-          <a:xfrm>
-            <a:off x="2003605" y="3200869"/>
-            <a:ext cx="612601" cy="307777"/>
-          </a:xfrm>
-          <a:prstGeom prst="rect">
-            <a:avLst/>
-          </a:prstGeom>
-          <a:noFill/>
-        </p:spPr>
-        <p:txBody>
-          <a:bodyPr wrap="square" rtlCol="0">
-            <a:spAutoFit/>
-          </a:bodyPr>
-          <a:lstStyle/>
-          <a:p>
-            <a:pPr algn="ctr"/>
-            <a:r>
-              <a:rPr lang="en-US" sz="1400" b="1" dirty="0"/>
-              <a:t>Andy</a:t>
-            </a:r>
-          </a:p>
-        </p:txBody>
-      </p:sp>
-      <p:pic>
-        <p:nvPicPr>
-          <p:cNvPr id="5" name="Picture 4">
-            <a:extLst>
-              <a:ext uri="{FF2B5EF4-FFF2-40B4-BE49-F238E27FC236}">
-                <a16:creationId xmlns:a16="http://schemas.microsoft.com/office/drawing/2014/main" id="{8B7DEF7A-CFC2-8B41-CBD6-C152897851E9}"/>
-              </a:ext>
-            </a:extLst>
-          </p:cNvPr>
-          <p:cNvPicPr>
-            <a:picLocks noChangeAspect="1"/>
-          </p:cNvPicPr>
-          <p:nvPr/>
-        </p:nvPicPr>
-        <p:blipFill>
-          <a:blip r:embed="rId5"/>
-          <a:srcRect l="18006" t="34092" b="1"/>
-          <a:stretch>
-            <a:fillRect/>
-          </a:stretch>
-        </p:blipFill>
-        <p:spPr>
-          <a:xfrm flipH="1">
-            <a:off x="3428947" y="3379552"/>
-            <a:ext cx="842433" cy="424417"/>
-          </a:xfrm>
-          <a:prstGeom prst="rect">
-            <a:avLst/>
-          </a:prstGeom>
-        </p:spPr>
-      </p:pic>
-      <p:sp>
-        <p:nvSpPr>
-          <p:cNvPr id="6" name="TextBox 5">
-            <a:extLst>
-              <a:ext uri="{FF2B5EF4-FFF2-40B4-BE49-F238E27FC236}">
-                <a16:creationId xmlns:a16="http://schemas.microsoft.com/office/drawing/2014/main" id="{F26121D4-9D1C-E4BD-E0D4-82C8018C03AE}"/>
-              </a:ext>
-            </a:extLst>
-          </p:cNvPr>
-          <p:cNvSpPr txBox="1"/>
-          <p:nvPr/>
-        </p:nvSpPr>
-        <p:spPr>
-          <a:xfrm>
-            <a:off x="6364240" y="3191905"/>
-            <a:ext cx="576656" cy="307777"/>
-          </a:xfrm>
-          <a:prstGeom prst="rect">
-            <a:avLst/>
-          </a:prstGeom>
-          <a:noFill/>
-        </p:spPr>
-        <p:txBody>
-          <a:bodyPr wrap="square" rtlCol="0">
-            <a:spAutoFit/>
-          </a:bodyPr>
-          <a:lstStyle/>
-          <a:p>
-            <a:pPr algn="ctr"/>
-            <a:r>
-              <a:rPr lang="en-US" sz="1400" b="1" dirty="0"/>
-              <a:t>Suzy</a:t>
-            </a:r>
-          </a:p>
-        </p:txBody>
-      </p:sp>
-      <p:pic>
-        <p:nvPicPr>
-          <p:cNvPr id="7" name="Picture 6">
-            <a:extLst>
-              <a:ext uri="{FF2B5EF4-FFF2-40B4-BE49-F238E27FC236}">
-                <a16:creationId xmlns:a16="http://schemas.microsoft.com/office/drawing/2014/main" id="{D9A43A30-61FC-E2FB-6B86-D8C393C98026}"/>
-              </a:ext>
-            </a:extLst>
-          </p:cNvPr>
-          <p:cNvPicPr>
-            <a:picLocks noChangeAspect="1"/>
-          </p:cNvPicPr>
-          <p:nvPr/>
-        </p:nvPicPr>
-        <p:blipFill>
-          <a:blip r:embed="rId5"/>
-          <a:srcRect l="18006" t="34092" b="1"/>
-          <a:stretch>
-            <a:fillRect/>
-          </a:stretch>
-        </p:blipFill>
-        <p:spPr>
-          <a:xfrm>
-            <a:off x="4664863" y="3377501"/>
-            <a:ext cx="842433" cy="424417"/>
-          </a:xfrm>
-          <a:prstGeom prst="rect">
-            <a:avLst/>
-          </a:prstGeom>
-        </p:spPr>
-      </p:pic>
-      <p:sp>
-        <p:nvSpPr>
-          <p:cNvPr id="8" name="TextBox 7">
-            <a:extLst>
-              <a:ext uri="{FF2B5EF4-FFF2-40B4-BE49-F238E27FC236}">
-                <a16:creationId xmlns:a16="http://schemas.microsoft.com/office/drawing/2014/main" id="{FD460AA7-654B-10B0-F712-719046E2F079}"/>
-              </a:ext>
-            </a:extLst>
-          </p:cNvPr>
-          <p:cNvSpPr txBox="1"/>
-          <p:nvPr/>
-        </p:nvSpPr>
-        <p:spPr>
-          <a:xfrm>
-            <a:off x="4576471" y="3191905"/>
-            <a:ext cx="612601" cy="307777"/>
-          </a:xfrm>
-          <a:prstGeom prst="rect">
-            <a:avLst/>
-          </a:prstGeom>
-          <a:noFill/>
-        </p:spPr>
-        <p:txBody>
-          <a:bodyPr wrap="square" rtlCol="0">
-            <a:spAutoFit/>
-          </a:bodyPr>
-          <a:lstStyle/>
-          <a:p>
-            <a:pPr algn="ctr"/>
-            <a:r>
-              <a:rPr lang="en-US" sz="1400" b="1" dirty="0"/>
-              <a:t>Andy</a:t>
-            </a:r>
-          </a:p>
-        </p:txBody>
-      </p:sp>
-      <p:pic>
-        <p:nvPicPr>
-          <p:cNvPr id="10" name="Picture 9">
-            <a:extLst>
-              <a:ext uri="{FF2B5EF4-FFF2-40B4-BE49-F238E27FC236}">
-                <a16:creationId xmlns:a16="http://schemas.microsoft.com/office/drawing/2014/main" id="{858B4A84-D622-53EF-6452-C8A4908FD173}"/>
-              </a:ext>
-            </a:extLst>
-          </p:cNvPr>
-          <p:cNvPicPr>
-            <a:picLocks noChangeAspect="1"/>
-          </p:cNvPicPr>
-          <p:nvPr/>
-        </p:nvPicPr>
-        <p:blipFill>
-          <a:blip r:embed="rId5"/>
-          <a:srcRect l="18006" t="34092" b="1"/>
-          <a:stretch>
-            <a:fillRect/>
-          </a:stretch>
-        </p:blipFill>
-        <p:spPr>
-          <a:xfrm flipH="1">
-            <a:off x="6015260" y="3370588"/>
-            <a:ext cx="842433" cy="424417"/>
-          </a:xfrm>
-          <a:prstGeom prst="rect">
-            <a:avLst/>
-          </a:prstGeom>
-        </p:spPr>
-      </p:pic>
-      <p:sp>
-        <p:nvSpPr>
-          <p:cNvPr id="11" name="TextBox 10">
-            <a:extLst>
-              <a:ext uri="{FF2B5EF4-FFF2-40B4-BE49-F238E27FC236}">
-                <a16:creationId xmlns:a16="http://schemas.microsoft.com/office/drawing/2014/main" id="{F1CDD45A-CEB7-A12D-1E76-4BB8AA534A55}"/>
-              </a:ext>
-            </a:extLst>
-          </p:cNvPr>
-          <p:cNvSpPr txBox="1"/>
-          <p:nvPr/>
-        </p:nvSpPr>
-        <p:spPr>
-          <a:xfrm>
-            <a:off x="8896764" y="3182941"/>
-            <a:ext cx="576656" cy="307777"/>
-          </a:xfrm>
-          <a:prstGeom prst="rect">
-            <a:avLst/>
-          </a:prstGeom>
-          <a:noFill/>
-        </p:spPr>
-        <p:txBody>
-          <a:bodyPr wrap="square" rtlCol="0">
-            <a:spAutoFit/>
-          </a:bodyPr>
-          <a:lstStyle/>
-          <a:p>
-            <a:pPr algn="ctr"/>
-            <a:r>
-              <a:rPr lang="en-US" sz="1400" b="1" dirty="0"/>
-              <a:t>Suzy</a:t>
-            </a:r>
-          </a:p>
-        </p:txBody>
-      </p:sp>
-      <p:pic>
-        <p:nvPicPr>
-          <p:cNvPr id="12" name="Picture 11">
-            <a:extLst>
-              <a:ext uri="{FF2B5EF4-FFF2-40B4-BE49-F238E27FC236}">
-                <a16:creationId xmlns:a16="http://schemas.microsoft.com/office/drawing/2014/main" id="{AC1706D6-1539-7123-82E5-E4B9B76BBC5F}"/>
-              </a:ext>
-            </a:extLst>
-          </p:cNvPr>
-          <p:cNvPicPr>
-            <a:picLocks noChangeAspect="1"/>
-          </p:cNvPicPr>
-          <p:nvPr/>
-        </p:nvPicPr>
-        <p:blipFill>
-          <a:blip r:embed="rId5"/>
-          <a:srcRect l="18006" t="34092" b="1"/>
-          <a:stretch>
-            <a:fillRect/>
-          </a:stretch>
-        </p:blipFill>
-        <p:spPr>
-          <a:xfrm>
-            <a:off x="7197387" y="3368537"/>
-            <a:ext cx="842433" cy="424417"/>
-          </a:xfrm>
-          <a:prstGeom prst="rect">
-            <a:avLst/>
-          </a:prstGeom>
-        </p:spPr>
-      </p:pic>
-      <p:sp>
-        <p:nvSpPr>
-          <p:cNvPr id="13" name="TextBox 12">
-            <a:extLst>
-              <a:ext uri="{FF2B5EF4-FFF2-40B4-BE49-F238E27FC236}">
-                <a16:creationId xmlns:a16="http://schemas.microsoft.com/office/drawing/2014/main" id="{0CB1CFE9-1014-21F1-137C-77D1D232B5DF}"/>
-              </a:ext>
-            </a:extLst>
-          </p:cNvPr>
-          <p:cNvSpPr txBox="1"/>
-          <p:nvPr/>
-        </p:nvSpPr>
-        <p:spPr>
-          <a:xfrm>
-            <a:off x="7108995" y="3182941"/>
-            <a:ext cx="612601" cy="307777"/>
-          </a:xfrm>
-          <a:prstGeom prst="rect">
-            <a:avLst/>
-          </a:prstGeom>
-          <a:noFill/>
-        </p:spPr>
-        <p:txBody>
-          <a:bodyPr wrap="square" rtlCol="0">
-            <a:spAutoFit/>
-          </a:bodyPr>
-          <a:lstStyle/>
-          <a:p>
-            <a:pPr algn="ctr"/>
-            <a:r>
-              <a:rPr lang="en-US" sz="1400" b="1" dirty="0"/>
-              <a:t>Andy</a:t>
-            </a:r>
-          </a:p>
-        </p:txBody>
-      </p:sp>
-      <p:pic>
-        <p:nvPicPr>
-          <p:cNvPr id="14" name="Picture 13">
-            <a:extLst>
-              <a:ext uri="{FF2B5EF4-FFF2-40B4-BE49-F238E27FC236}">
-                <a16:creationId xmlns:a16="http://schemas.microsoft.com/office/drawing/2014/main" id="{92EF21C9-FE52-B943-6DA5-74A225F70D4B}"/>
-              </a:ext>
-            </a:extLst>
-          </p:cNvPr>
-          <p:cNvPicPr>
-            <a:picLocks noChangeAspect="1"/>
-          </p:cNvPicPr>
-          <p:nvPr/>
-        </p:nvPicPr>
-        <p:blipFill>
-          <a:blip r:embed="rId5"/>
-          <a:srcRect l="18006" t="34092" b="1"/>
-          <a:stretch>
-            <a:fillRect/>
-          </a:stretch>
-        </p:blipFill>
-        <p:spPr>
-          <a:xfrm flipH="1">
-            <a:off x="8547784" y="3361624"/>
-            <a:ext cx="842433" cy="424417"/>
-          </a:xfrm>
-          <a:prstGeom prst="rect">
-            <a:avLst/>
-          </a:prstGeom>
-        </p:spPr>
-      </p:pic>
-      <p:sp>
-        <p:nvSpPr>
-          <p:cNvPr id="28" name="TextBox 27">
-            <a:extLst>
-              <a:ext uri="{FF2B5EF4-FFF2-40B4-BE49-F238E27FC236}">
-                <a16:creationId xmlns:a16="http://schemas.microsoft.com/office/drawing/2014/main" id="{E04696BA-5745-650E-1D03-8AEA9684D576}"/>
-              </a:ext>
-            </a:extLst>
-          </p:cNvPr>
-          <p:cNvSpPr txBox="1"/>
-          <p:nvPr/>
-        </p:nvSpPr>
-        <p:spPr>
-          <a:xfrm>
-            <a:off x="8908055" y="5226887"/>
-            <a:ext cx="576656" cy="307777"/>
-          </a:xfrm>
-          <a:prstGeom prst="rect">
-            <a:avLst/>
-          </a:prstGeom>
-          <a:noFill/>
-        </p:spPr>
-        <p:txBody>
-          <a:bodyPr wrap="square" rtlCol="0">
-            <a:spAutoFit/>
-          </a:bodyPr>
-          <a:lstStyle/>
-          <a:p>
-            <a:pPr algn="ctr"/>
-            <a:r>
-              <a:rPr lang="en-US" sz="1400" b="1" dirty="0"/>
-              <a:t>Suzy</a:t>
-            </a:r>
-          </a:p>
-        </p:txBody>
-      </p:sp>
-      <p:pic>
-        <p:nvPicPr>
-          <p:cNvPr id="29" name="Picture 28">
-            <a:extLst>
-              <a:ext uri="{FF2B5EF4-FFF2-40B4-BE49-F238E27FC236}">
-                <a16:creationId xmlns:a16="http://schemas.microsoft.com/office/drawing/2014/main" id="{941EE7EC-93BC-0BB4-85DC-992A4DDE40C7}"/>
-              </a:ext>
-            </a:extLst>
-          </p:cNvPr>
-          <p:cNvPicPr>
-            <a:picLocks noChangeAspect="1"/>
-          </p:cNvPicPr>
-          <p:nvPr/>
-        </p:nvPicPr>
-        <p:blipFill>
-          <a:blip r:embed="rId5"/>
-          <a:srcRect l="18006" t="34092" b="1"/>
-          <a:stretch>
-            <a:fillRect/>
-          </a:stretch>
-        </p:blipFill>
-        <p:spPr>
-          <a:xfrm>
-            <a:off x="7197389" y="5412483"/>
-            <a:ext cx="842433" cy="424417"/>
-          </a:xfrm>
-          <a:prstGeom prst="rect">
-            <a:avLst/>
-          </a:prstGeom>
-        </p:spPr>
-      </p:pic>
-      <p:sp>
-        <p:nvSpPr>
-          <p:cNvPr id="33" name="TextBox 32">
-            <a:extLst>
-              <a:ext uri="{FF2B5EF4-FFF2-40B4-BE49-F238E27FC236}">
-                <a16:creationId xmlns:a16="http://schemas.microsoft.com/office/drawing/2014/main" id="{3DE391CD-7151-5A3F-F344-FC0EEF4F4CD1}"/>
-              </a:ext>
-            </a:extLst>
-          </p:cNvPr>
-          <p:cNvSpPr txBox="1"/>
-          <p:nvPr/>
-        </p:nvSpPr>
-        <p:spPr>
-          <a:xfrm>
-            <a:off x="7108997" y="5226887"/>
-            <a:ext cx="612601" cy="307777"/>
-          </a:xfrm>
-          <a:prstGeom prst="rect">
-            <a:avLst/>
-          </a:prstGeom>
-          <a:noFill/>
-        </p:spPr>
-        <p:txBody>
-          <a:bodyPr wrap="square" rtlCol="0">
-            <a:spAutoFit/>
-          </a:bodyPr>
-          <a:lstStyle/>
-          <a:p>
-            <a:pPr algn="ctr"/>
-            <a:r>
-              <a:rPr lang="en-US" sz="1400" b="1" dirty="0"/>
-              <a:t>Andy</a:t>
-            </a:r>
-          </a:p>
-        </p:txBody>
-      </p:sp>
-      <p:pic>
-        <p:nvPicPr>
-          <p:cNvPr id="34" name="Picture 33">
-            <a:extLst>
-              <a:ext uri="{FF2B5EF4-FFF2-40B4-BE49-F238E27FC236}">
-                <a16:creationId xmlns:a16="http://schemas.microsoft.com/office/drawing/2014/main" id="{34B2D670-3972-A7B7-ECDC-E5EF3F8BCF9B}"/>
-              </a:ext>
-            </a:extLst>
-          </p:cNvPr>
-          <p:cNvPicPr>
-            <a:picLocks noChangeAspect="1"/>
-          </p:cNvPicPr>
-          <p:nvPr/>
-        </p:nvPicPr>
-        <p:blipFill>
-          <a:blip r:embed="rId5"/>
-          <a:srcRect l="18006" t="34092" b="1"/>
-          <a:stretch>
-            <a:fillRect/>
-          </a:stretch>
-        </p:blipFill>
-        <p:spPr>
-          <a:xfrm flipH="1">
-            <a:off x="8547786" y="5405570"/>
-            <a:ext cx="842433" cy="424417"/>
-          </a:xfrm>
-          <a:prstGeom prst="rect">
-            <a:avLst/>
-          </a:prstGeom>
-        </p:spPr>
-      </p:pic>
-      <p:pic>
-        <p:nvPicPr>
-          <p:cNvPr id="4" name="Picture 3">
-            <a:extLst>
-              <a:ext uri="{FF2B5EF4-FFF2-40B4-BE49-F238E27FC236}">
-                <a16:creationId xmlns:a16="http://schemas.microsoft.com/office/drawing/2014/main" id="{71290097-0285-CA5C-5C95-9668BF8FD90D}"/>
-              </a:ext>
-            </a:extLst>
-          </p:cNvPr>
-          <p:cNvPicPr>
-            <a:picLocks noChangeAspect="1"/>
-          </p:cNvPicPr>
-          <p:nvPr/>
-        </p:nvPicPr>
-        <p:blipFill>
-          <a:blip r:embed="rId6"/>
-          <a:stretch>
-            <a:fillRect/>
-          </a:stretch>
-        </p:blipFill>
-        <p:spPr>
-          <a:xfrm>
-            <a:off x="2553067" y="574532"/>
-            <a:ext cx="365760" cy="365760"/>
-          </a:xfrm>
-          <a:prstGeom prst="rect">
-            <a:avLst/>
-          </a:prstGeom>
-        </p:spPr>
-      </p:pic>
-      <p:pic>
-        <p:nvPicPr>
-          <p:cNvPr id="15" name="Picture 14">
-            <a:extLst>
-              <a:ext uri="{FF2B5EF4-FFF2-40B4-BE49-F238E27FC236}">
-                <a16:creationId xmlns:a16="http://schemas.microsoft.com/office/drawing/2014/main" id="{AED5F787-DE4D-7541-52D5-2836942083E1}"/>
-              </a:ext>
-            </a:extLst>
-          </p:cNvPr>
-          <p:cNvPicPr>
-            <a:picLocks noChangeAspect="1"/>
-          </p:cNvPicPr>
-          <p:nvPr/>
-        </p:nvPicPr>
-        <p:blipFill>
-          <a:blip r:embed="rId7"/>
-          <a:stretch>
-            <a:fillRect/>
-          </a:stretch>
-        </p:blipFill>
-        <p:spPr>
-          <a:xfrm>
-            <a:off x="3580344" y="717914"/>
-            <a:ext cx="182880" cy="236338"/>
-          </a:xfrm>
-          <a:prstGeom prst="rect">
-            <a:avLst/>
-          </a:prstGeom>
-        </p:spPr>
-      </p:pic>
-      <p:pic>
-        <p:nvPicPr>
-          <p:cNvPr id="19" name="Picture 18">
-            <a:extLst>
-              <a:ext uri="{FF2B5EF4-FFF2-40B4-BE49-F238E27FC236}">
-                <a16:creationId xmlns:a16="http://schemas.microsoft.com/office/drawing/2014/main" id="{C8247903-D3AB-6426-E6C1-DB547B62A5A3}"/>
-              </a:ext>
-            </a:extLst>
-          </p:cNvPr>
-          <p:cNvPicPr>
-            <a:picLocks noChangeAspect="1"/>
-          </p:cNvPicPr>
-          <p:nvPr/>
-        </p:nvPicPr>
-        <p:blipFill>
-          <a:blip r:embed="rId6"/>
-          <a:stretch>
-            <a:fillRect/>
-          </a:stretch>
-        </p:blipFill>
-        <p:spPr>
-          <a:xfrm>
-            <a:off x="2558710" y="3142756"/>
-            <a:ext cx="365760" cy="365760"/>
-          </a:xfrm>
-          <a:prstGeom prst="rect">
-            <a:avLst/>
-          </a:prstGeom>
-        </p:spPr>
-      </p:pic>
-      <p:pic>
-        <p:nvPicPr>
-          <p:cNvPr id="20" name="Picture 19">
-            <a:extLst>
-              <a:ext uri="{FF2B5EF4-FFF2-40B4-BE49-F238E27FC236}">
-                <a16:creationId xmlns:a16="http://schemas.microsoft.com/office/drawing/2014/main" id="{B06AA3EA-2102-A148-DAE6-9AFE20974545}"/>
-              </a:ext>
-            </a:extLst>
-          </p:cNvPr>
-          <p:cNvPicPr>
-            <a:picLocks noChangeAspect="1"/>
-          </p:cNvPicPr>
-          <p:nvPr/>
-        </p:nvPicPr>
-        <p:blipFill>
-          <a:blip r:embed="rId7"/>
-          <a:stretch>
-            <a:fillRect/>
-          </a:stretch>
-        </p:blipFill>
-        <p:spPr>
-          <a:xfrm>
-            <a:off x="3585987" y="3286138"/>
-            <a:ext cx="182880" cy="236338"/>
-          </a:xfrm>
-          <a:prstGeom prst="rect">
-            <a:avLst/>
-          </a:prstGeom>
-        </p:spPr>
-      </p:pic>
-      <p:pic>
-        <p:nvPicPr>
-          <p:cNvPr id="21" name="Picture 20">
-            <a:extLst>
-              <a:ext uri="{FF2B5EF4-FFF2-40B4-BE49-F238E27FC236}">
-                <a16:creationId xmlns:a16="http://schemas.microsoft.com/office/drawing/2014/main" id="{B2925415-2D86-3721-741E-4AEA04633524}"/>
-              </a:ext>
-            </a:extLst>
-          </p:cNvPr>
-          <p:cNvPicPr>
-            <a:picLocks noChangeAspect="1"/>
-          </p:cNvPicPr>
-          <p:nvPr/>
-        </p:nvPicPr>
-        <p:blipFill>
-          <a:blip r:embed="rId8"/>
-          <a:stretch>
-            <a:fillRect/>
-          </a:stretch>
-        </p:blipFill>
-        <p:spPr>
-          <a:xfrm>
-            <a:off x="4935039" y="1768043"/>
-            <a:ext cx="640080" cy="443790"/>
-          </a:xfrm>
-          <a:prstGeom prst="rect">
-            <a:avLst/>
-          </a:prstGeom>
-        </p:spPr>
-      </p:pic>
-      <p:pic>
-        <p:nvPicPr>
-          <p:cNvPr id="22" name="Picture 21">
-            <a:extLst>
-              <a:ext uri="{FF2B5EF4-FFF2-40B4-BE49-F238E27FC236}">
-                <a16:creationId xmlns:a16="http://schemas.microsoft.com/office/drawing/2014/main" id="{6146F422-D7E2-A75D-AEC1-12339F632378}"/>
-              </a:ext>
-            </a:extLst>
-          </p:cNvPr>
-          <p:cNvPicPr>
-            <a:picLocks noChangeAspect="1"/>
-          </p:cNvPicPr>
-          <p:nvPr/>
-        </p:nvPicPr>
-        <p:blipFill>
-          <a:blip r:embed="rId8"/>
-          <a:stretch>
-            <a:fillRect/>
-          </a:stretch>
-        </p:blipFill>
-        <p:spPr>
-          <a:xfrm>
-            <a:off x="4918104" y="3760534"/>
-            <a:ext cx="640080" cy="443790"/>
-          </a:xfrm>
-          <a:prstGeom prst="rect">
-            <a:avLst/>
-          </a:prstGeom>
-        </p:spPr>
-      </p:pic>
-      <p:pic>
-        <p:nvPicPr>
-          <p:cNvPr id="25" name="Picture 24">
-            <a:extLst>
-              <a:ext uri="{FF2B5EF4-FFF2-40B4-BE49-F238E27FC236}">
-                <a16:creationId xmlns:a16="http://schemas.microsoft.com/office/drawing/2014/main" id="{E8C1665B-FD32-C5AC-466D-D33D0EEAC95B}"/>
-              </a:ext>
-            </a:extLst>
-          </p:cNvPr>
-          <p:cNvPicPr>
-            <a:picLocks noChangeAspect="1"/>
-          </p:cNvPicPr>
-          <p:nvPr/>
-        </p:nvPicPr>
-        <p:blipFill>
-          <a:blip r:embed="rId6"/>
-          <a:stretch>
-            <a:fillRect/>
-          </a:stretch>
-        </p:blipFill>
-        <p:spPr>
-          <a:xfrm>
-            <a:off x="5102961" y="589311"/>
-            <a:ext cx="365760" cy="365760"/>
-          </a:xfrm>
-          <a:prstGeom prst="rect">
-            <a:avLst/>
-          </a:prstGeom>
-        </p:spPr>
-      </p:pic>
-      <p:pic>
-        <p:nvPicPr>
-          <p:cNvPr id="26" name="Picture 25">
-            <a:extLst>
-              <a:ext uri="{FF2B5EF4-FFF2-40B4-BE49-F238E27FC236}">
-                <a16:creationId xmlns:a16="http://schemas.microsoft.com/office/drawing/2014/main" id="{02769775-1057-14B0-68AC-A8E522EEC287}"/>
-              </a:ext>
-            </a:extLst>
-          </p:cNvPr>
-          <p:cNvPicPr>
-            <a:picLocks noChangeAspect="1"/>
-          </p:cNvPicPr>
-          <p:nvPr/>
-        </p:nvPicPr>
-        <p:blipFill>
-          <a:blip r:embed="rId6"/>
-          <a:stretch>
-            <a:fillRect/>
-          </a:stretch>
-        </p:blipFill>
-        <p:spPr>
-          <a:xfrm>
-            <a:off x="6046430" y="585812"/>
-            <a:ext cx="365760" cy="365760"/>
-          </a:xfrm>
-          <a:prstGeom prst="rect">
-            <a:avLst/>
-          </a:prstGeom>
-        </p:spPr>
-      </p:pic>
-      <p:pic>
-        <p:nvPicPr>
-          <p:cNvPr id="27" name="Picture 26">
-            <a:extLst>
-              <a:ext uri="{FF2B5EF4-FFF2-40B4-BE49-F238E27FC236}">
-                <a16:creationId xmlns:a16="http://schemas.microsoft.com/office/drawing/2014/main" id="{62C408A4-1D67-5161-DBA8-95C92FFFFEF0}"/>
-              </a:ext>
-            </a:extLst>
-          </p:cNvPr>
-          <p:cNvPicPr>
-            <a:picLocks noChangeAspect="1"/>
-          </p:cNvPicPr>
-          <p:nvPr/>
-        </p:nvPicPr>
-        <p:blipFill>
-          <a:blip r:embed="rId6"/>
-          <a:stretch>
-            <a:fillRect/>
-          </a:stretch>
-        </p:blipFill>
-        <p:spPr>
-          <a:xfrm>
-            <a:off x="5130680" y="3146255"/>
-            <a:ext cx="365760" cy="365760"/>
-          </a:xfrm>
-          <a:prstGeom prst="rect">
-            <a:avLst/>
-          </a:prstGeom>
-        </p:spPr>
-      </p:pic>
-      <p:pic>
-        <p:nvPicPr>
-          <p:cNvPr id="36" name="Picture 35">
-            <a:extLst>
-              <a:ext uri="{FF2B5EF4-FFF2-40B4-BE49-F238E27FC236}">
-                <a16:creationId xmlns:a16="http://schemas.microsoft.com/office/drawing/2014/main" id="{850C70B5-D429-C34C-58D3-1919C800ABF1}"/>
-              </a:ext>
-            </a:extLst>
-          </p:cNvPr>
-          <p:cNvPicPr>
-            <a:picLocks noChangeAspect="1"/>
-          </p:cNvPicPr>
-          <p:nvPr/>
-        </p:nvPicPr>
-        <p:blipFill>
-          <a:blip r:embed="rId6"/>
-          <a:stretch>
-            <a:fillRect/>
-          </a:stretch>
-        </p:blipFill>
-        <p:spPr>
-          <a:xfrm>
-            <a:off x="6074149" y="3142756"/>
-            <a:ext cx="365760" cy="365760"/>
-          </a:xfrm>
-          <a:prstGeom prst="rect">
-            <a:avLst/>
-          </a:prstGeom>
-        </p:spPr>
-      </p:pic>
-      <p:pic>
-        <p:nvPicPr>
-          <p:cNvPr id="37" name="Picture 36">
-            <a:extLst>
-              <a:ext uri="{FF2B5EF4-FFF2-40B4-BE49-F238E27FC236}">
-                <a16:creationId xmlns:a16="http://schemas.microsoft.com/office/drawing/2014/main" id="{DC5FC9C8-8226-C729-5B1D-C0575FF67B0E}"/>
-              </a:ext>
-            </a:extLst>
-          </p:cNvPr>
-          <p:cNvPicPr>
-            <a:picLocks noChangeAspect="1"/>
-          </p:cNvPicPr>
-          <p:nvPr/>
-        </p:nvPicPr>
-        <p:blipFill>
-          <a:blip r:embed="rId6"/>
-          <a:stretch>
-            <a:fillRect/>
-          </a:stretch>
-        </p:blipFill>
-        <p:spPr>
-          <a:xfrm>
-            <a:off x="7661120" y="572852"/>
-            <a:ext cx="365760" cy="365760"/>
-          </a:xfrm>
-          <a:prstGeom prst="rect">
-            <a:avLst/>
-          </a:prstGeom>
-        </p:spPr>
-      </p:pic>
-      <p:pic>
-        <p:nvPicPr>
-          <p:cNvPr id="41" name="Picture 40">
-            <a:extLst>
-              <a:ext uri="{FF2B5EF4-FFF2-40B4-BE49-F238E27FC236}">
-                <a16:creationId xmlns:a16="http://schemas.microsoft.com/office/drawing/2014/main" id="{4D512D05-F516-A376-386D-193C26D3F79A}"/>
-              </a:ext>
-            </a:extLst>
-          </p:cNvPr>
-          <p:cNvPicPr>
-            <a:picLocks noChangeAspect="1"/>
-          </p:cNvPicPr>
-          <p:nvPr/>
-        </p:nvPicPr>
-        <p:blipFill>
-          <a:blip r:embed="rId6"/>
-          <a:stretch>
-            <a:fillRect/>
-          </a:stretch>
-        </p:blipFill>
-        <p:spPr>
-          <a:xfrm>
-            <a:off x="8604589" y="569353"/>
-            <a:ext cx="365760" cy="365760"/>
-          </a:xfrm>
-          <a:prstGeom prst="rect">
-            <a:avLst/>
-          </a:prstGeom>
-        </p:spPr>
-      </p:pic>
-      <p:pic>
-        <p:nvPicPr>
-          <p:cNvPr id="42" name="Picture 41">
-            <a:extLst>
-              <a:ext uri="{FF2B5EF4-FFF2-40B4-BE49-F238E27FC236}">
-                <a16:creationId xmlns:a16="http://schemas.microsoft.com/office/drawing/2014/main" id="{2DCD7E36-D946-3009-44B4-25172372A080}"/>
-              </a:ext>
-            </a:extLst>
-          </p:cNvPr>
-          <p:cNvPicPr>
-            <a:picLocks noChangeAspect="1"/>
-          </p:cNvPicPr>
-          <p:nvPr/>
-        </p:nvPicPr>
-        <p:blipFill>
-          <a:blip r:embed="rId6"/>
-          <a:stretch>
-            <a:fillRect/>
-          </a:stretch>
-        </p:blipFill>
-        <p:spPr>
-          <a:xfrm>
-            <a:off x="7677092" y="3141057"/>
-            <a:ext cx="365760" cy="365760"/>
-          </a:xfrm>
-          <a:prstGeom prst="rect">
-            <a:avLst/>
-          </a:prstGeom>
-        </p:spPr>
-      </p:pic>
-      <p:pic>
-        <p:nvPicPr>
-          <p:cNvPr id="43" name="Picture 42">
-            <a:extLst>
-              <a:ext uri="{FF2B5EF4-FFF2-40B4-BE49-F238E27FC236}">
-                <a16:creationId xmlns:a16="http://schemas.microsoft.com/office/drawing/2014/main" id="{D4B83FEE-F757-721B-08AB-D56C816D3C38}"/>
-              </a:ext>
-            </a:extLst>
-          </p:cNvPr>
-          <p:cNvPicPr>
-            <a:picLocks noChangeAspect="1"/>
-          </p:cNvPicPr>
-          <p:nvPr/>
-        </p:nvPicPr>
-        <p:blipFill>
-          <a:blip r:embed="rId6"/>
-          <a:stretch>
-            <a:fillRect/>
-          </a:stretch>
-        </p:blipFill>
-        <p:spPr>
-          <a:xfrm>
-            <a:off x="8620561" y="3137558"/>
-            <a:ext cx="365760" cy="365760"/>
-          </a:xfrm>
-          <a:prstGeom prst="rect">
-            <a:avLst/>
-          </a:prstGeom>
-        </p:spPr>
-      </p:pic>
-      <p:pic>
-        <p:nvPicPr>
-          <p:cNvPr id="46" name="Picture 45">
-            <a:extLst>
-              <a:ext uri="{FF2B5EF4-FFF2-40B4-BE49-F238E27FC236}">
-                <a16:creationId xmlns:a16="http://schemas.microsoft.com/office/drawing/2014/main" id="{18296C6E-935D-E835-6F53-34F9FB9A2730}"/>
-              </a:ext>
-            </a:extLst>
-          </p:cNvPr>
-          <p:cNvPicPr>
-            <a:picLocks noChangeAspect="1"/>
-          </p:cNvPicPr>
-          <p:nvPr/>
-        </p:nvPicPr>
-        <p:blipFill>
-          <a:blip r:embed="rId6"/>
-          <a:stretch>
-            <a:fillRect/>
-          </a:stretch>
-        </p:blipFill>
-        <p:spPr>
-          <a:xfrm>
-            <a:off x="7698658" y="5190131"/>
-            <a:ext cx="365760" cy="365760"/>
-          </a:xfrm>
-          <a:prstGeom prst="rect">
-            <a:avLst/>
-          </a:prstGeom>
-        </p:spPr>
-      </p:pic>
-      <p:pic>
-        <p:nvPicPr>
-          <p:cNvPr id="47" name="Picture 46">
-            <a:extLst>
-              <a:ext uri="{FF2B5EF4-FFF2-40B4-BE49-F238E27FC236}">
-                <a16:creationId xmlns:a16="http://schemas.microsoft.com/office/drawing/2014/main" id="{EA3F1B3A-9545-05B4-6CF6-B926A165F3E1}"/>
-              </a:ext>
-            </a:extLst>
-          </p:cNvPr>
-          <p:cNvPicPr>
-            <a:picLocks noChangeAspect="1"/>
-          </p:cNvPicPr>
-          <p:nvPr/>
-        </p:nvPicPr>
-        <p:blipFill>
-          <a:blip r:embed="rId6"/>
-          <a:stretch>
-            <a:fillRect/>
-          </a:stretch>
-        </p:blipFill>
-        <p:spPr>
-          <a:xfrm>
-            <a:off x="8642127" y="5186632"/>
-            <a:ext cx="365760" cy="365760"/>
-          </a:xfrm>
-          <a:prstGeom prst="rect">
-            <a:avLst/>
-          </a:prstGeom>
-        </p:spPr>
-      </p:pic>
-      <p:pic>
-        <p:nvPicPr>
-          <p:cNvPr id="48" name="Picture 47">
-            <a:extLst>
-              <a:ext uri="{FF2B5EF4-FFF2-40B4-BE49-F238E27FC236}">
-                <a16:creationId xmlns:a16="http://schemas.microsoft.com/office/drawing/2014/main" id="{938FBF57-37B3-241E-F9DC-C9A1325B51B0}"/>
-              </a:ext>
-            </a:extLst>
-          </p:cNvPr>
-          <p:cNvPicPr>
-            <a:picLocks noChangeAspect="1"/>
-          </p:cNvPicPr>
-          <p:nvPr/>
-        </p:nvPicPr>
-        <p:blipFill>
-          <a:blip r:embed="rId8"/>
-          <a:stretch>
-            <a:fillRect/>
-          </a:stretch>
-        </p:blipFill>
-        <p:spPr>
-          <a:xfrm>
-            <a:off x="7518745" y="5778243"/>
-            <a:ext cx="640080" cy="443790"/>
-          </a:xfrm>
-          <a:prstGeom prst="rect">
-            <a:avLst/>
-          </a:prstGeom>
-        </p:spPr>
-      </p:pic>
-      <p:sp>
-        <p:nvSpPr>
-          <p:cNvPr id="49" name="Rectangle 48">
-            <a:extLst>
-              <a:ext uri="{FF2B5EF4-FFF2-40B4-BE49-F238E27FC236}">
-                <a16:creationId xmlns:a16="http://schemas.microsoft.com/office/drawing/2014/main" id="{53E5F702-686C-6555-BB1B-E50806B61889}"/>
+      <p:sp>
+        <p:nvSpPr>
+          <p:cNvPr id="50" name="Rectangle 49">
+            <a:extLst>
+              <a:ext uri="{FF2B5EF4-FFF2-40B4-BE49-F238E27FC236}">
+                <a16:creationId xmlns:a16="http://schemas.microsoft.com/office/drawing/2014/main" id="{FDF1FA52-DD7B-C935-E2A6-CA4751956A50}"/>
               </a:ext>
             </a:extLst>
           </p:cNvPr>
@@ -5489,7 +5491,7 @@
         </p:nvSpPr>
         <p:spPr>
           <a:xfrm>
-            <a:off x="7197387" y="3756762"/>
+            <a:off x="7114657" y="1663227"/>
             <a:ext cx="2219588" cy="284660"/>
           </a:xfrm>
           <a:prstGeom prst="rect">
@@ -5531,10 +5533,115 @@
       </p:sp>
       <p:sp>
         <p:nvSpPr>
-          <p:cNvPr id="50" name="Rectangle 49">
-            <a:extLst>
-              <a:ext uri="{FF2B5EF4-FFF2-40B4-BE49-F238E27FC236}">
-                <a16:creationId xmlns:a16="http://schemas.microsoft.com/office/drawing/2014/main" id="{FDF1FA52-DD7B-C935-E2A6-CA4751956A50}"/>
+          <p:cNvPr id="3" name="TextBox 2">
+            <a:extLst>
+              <a:ext uri="{FF2B5EF4-FFF2-40B4-BE49-F238E27FC236}">
+                <a16:creationId xmlns:a16="http://schemas.microsoft.com/office/drawing/2014/main" id="{C71C8091-3EB0-8532-9AE6-45B61D3B0D9E}"/>
+              </a:ext>
+            </a:extLst>
+          </p:cNvPr>
+          <p:cNvSpPr txBox="1"/>
+          <p:nvPr/>
+        </p:nvSpPr>
+        <p:spPr>
+          <a:xfrm>
+            <a:off x="1901167" y="29787"/>
+            <a:ext cx="250698" cy="461665"/>
+          </a:xfrm>
+          <a:prstGeom prst="rect">
+            <a:avLst/>
+          </a:prstGeom>
+          <a:noFill/>
+        </p:spPr>
+        <p:txBody>
+          <a:bodyPr wrap="square" rtlCol="0">
+            <a:spAutoFit/>
+          </a:bodyPr>
+          <a:lstStyle/>
+          <a:p>
+            <a:r>
+              <a:rPr lang="en-US" sz="2400" b="1" dirty="0"/>
+              <a:t>A</a:t>
+            </a:r>
+          </a:p>
+        </p:txBody>
+      </p:sp>
+      <p:sp>
+        <p:nvSpPr>
+          <p:cNvPr id="17" name="TextBox 16">
+            <a:extLst>
+              <a:ext uri="{FF2B5EF4-FFF2-40B4-BE49-F238E27FC236}">
+                <a16:creationId xmlns:a16="http://schemas.microsoft.com/office/drawing/2014/main" id="{708ECC54-5ECC-DFD3-558A-C0E8802D4A50}"/>
+              </a:ext>
+            </a:extLst>
+          </p:cNvPr>
+          <p:cNvSpPr txBox="1"/>
+          <p:nvPr/>
+        </p:nvSpPr>
+        <p:spPr>
+          <a:xfrm>
+            <a:off x="4451122" y="29787"/>
+            <a:ext cx="250698" cy="461665"/>
+          </a:xfrm>
+          <a:prstGeom prst="rect">
+            <a:avLst/>
+          </a:prstGeom>
+          <a:noFill/>
+        </p:spPr>
+        <p:txBody>
+          <a:bodyPr wrap="square" rtlCol="0">
+            <a:spAutoFit/>
+          </a:bodyPr>
+          <a:lstStyle/>
+          <a:p>
+            <a:r>
+              <a:rPr lang="en-US" sz="2400" b="1" dirty="0"/>
+              <a:t>B</a:t>
+            </a:r>
+          </a:p>
+        </p:txBody>
+      </p:sp>
+      <p:sp>
+        <p:nvSpPr>
+          <p:cNvPr id="18" name="TextBox 17">
+            <a:extLst>
+              <a:ext uri="{FF2B5EF4-FFF2-40B4-BE49-F238E27FC236}">
+                <a16:creationId xmlns:a16="http://schemas.microsoft.com/office/drawing/2014/main" id="{6A24ED1B-900C-525B-686F-A3C4D786B4BA}"/>
+              </a:ext>
+            </a:extLst>
+          </p:cNvPr>
+          <p:cNvSpPr txBox="1"/>
+          <p:nvPr/>
+        </p:nvSpPr>
+        <p:spPr>
+          <a:xfrm>
+            <a:off x="7029546" y="29787"/>
+            <a:ext cx="250698" cy="461665"/>
+          </a:xfrm>
+          <a:prstGeom prst="rect">
+            <a:avLst/>
+          </a:prstGeom>
+          <a:noFill/>
+        </p:spPr>
+        <p:txBody>
+          <a:bodyPr wrap="square" rtlCol="0">
+            <a:spAutoFit/>
+          </a:bodyPr>
+          <a:lstStyle/>
+          <a:p>
+            <a:r>
+              <a:rPr lang="en-US" sz="2400" b="1" dirty="0"/>
+              <a:t>C</a:t>
+            </a:r>
+          </a:p>
+        </p:txBody>
+      </p:sp>
+      <p:sp>
+        <p:nvSpPr>
+          <p:cNvPr id="1055" name="Rectangle 1054">
+            <a:extLst>
+              <a:ext uri="{FF2B5EF4-FFF2-40B4-BE49-F238E27FC236}">
+                <a16:creationId xmlns:a16="http://schemas.microsoft.com/office/drawing/2014/main" id="{695AC2FE-70E6-387A-86C5-F40ED7901311}"/>
               </a:ext>
             </a:extLst>
           </p:cNvPr>
@@ -5543,18 +5650,16 @@
         </p:nvSpPr>
         <p:spPr>
           <a:xfrm>
-            <a:off x="7114657" y="1663227"/>
-            <a:ext cx="2219588" cy="284660"/>
-          </a:xfrm>
-          <a:prstGeom prst="rect">
-            <a:avLst/>
-          </a:prstGeom>
-          <a:solidFill>
-            <a:schemeClr val="bg1"/>
-          </a:solidFill>
+            <a:off x="7096700" y="2445677"/>
+            <a:ext cx="2411896" cy="1298787"/>
+          </a:xfrm>
+          <a:prstGeom prst="rect">
+            <a:avLst/>
+          </a:prstGeom>
+          <a:noFill/>
           <a:ln>
             <a:solidFill>
-              <a:schemeClr val="bg1"/>
+              <a:schemeClr val="tx1"/>
             </a:solidFill>
           </a:ln>
         </p:spPr>
@@ -5580,111 +5685,6 @@
           <a:p>
             <a:pPr algn="ctr"/>
             <a:endParaRPr lang="en-US"/>
-          </a:p>
-        </p:txBody>
-      </p:sp>
-      <p:sp>
-        <p:nvSpPr>
-          <p:cNvPr id="3" name="TextBox 2">
-            <a:extLst>
-              <a:ext uri="{FF2B5EF4-FFF2-40B4-BE49-F238E27FC236}">
-                <a16:creationId xmlns:a16="http://schemas.microsoft.com/office/drawing/2014/main" id="{C71C8091-3EB0-8532-9AE6-45B61D3B0D9E}"/>
-              </a:ext>
-            </a:extLst>
-          </p:cNvPr>
-          <p:cNvSpPr txBox="1"/>
-          <p:nvPr/>
-        </p:nvSpPr>
-        <p:spPr>
-          <a:xfrm>
-            <a:off x="1901167" y="29787"/>
-            <a:ext cx="250698" cy="461665"/>
-          </a:xfrm>
-          <a:prstGeom prst="rect">
-            <a:avLst/>
-          </a:prstGeom>
-          <a:noFill/>
-        </p:spPr>
-        <p:txBody>
-          <a:bodyPr wrap="square" rtlCol="0">
-            <a:spAutoFit/>
-          </a:bodyPr>
-          <a:lstStyle/>
-          <a:p>
-            <a:r>
-              <a:rPr lang="en-US" sz="2400" b="1" dirty="0"/>
-              <a:t>A</a:t>
-            </a:r>
-          </a:p>
-        </p:txBody>
-      </p:sp>
-      <p:sp>
-        <p:nvSpPr>
-          <p:cNvPr id="17" name="TextBox 16">
-            <a:extLst>
-              <a:ext uri="{FF2B5EF4-FFF2-40B4-BE49-F238E27FC236}">
-                <a16:creationId xmlns:a16="http://schemas.microsoft.com/office/drawing/2014/main" id="{708ECC54-5ECC-DFD3-558A-C0E8802D4A50}"/>
-              </a:ext>
-            </a:extLst>
-          </p:cNvPr>
-          <p:cNvSpPr txBox="1"/>
-          <p:nvPr/>
-        </p:nvSpPr>
-        <p:spPr>
-          <a:xfrm>
-            <a:off x="4451122" y="29787"/>
-            <a:ext cx="250698" cy="461665"/>
-          </a:xfrm>
-          <a:prstGeom prst="rect">
-            <a:avLst/>
-          </a:prstGeom>
-          <a:noFill/>
-        </p:spPr>
-        <p:txBody>
-          <a:bodyPr wrap="square" rtlCol="0">
-            <a:spAutoFit/>
-          </a:bodyPr>
-          <a:lstStyle/>
-          <a:p>
-            <a:r>
-              <a:rPr lang="en-US" sz="2400" b="1" dirty="0"/>
-              <a:t>B</a:t>
-            </a:r>
-          </a:p>
-        </p:txBody>
-      </p:sp>
-      <p:sp>
-        <p:nvSpPr>
-          <p:cNvPr id="18" name="TextBox 17">
-            <a:extLst>
-              <a:ext uri="{FF2B5EF4-FFF2-40B4-BE49-F238E27FC236}">
-                <a16:creationId xmlns:a16="http://schemas.microsoft.com/office/drawing/2014/main" id="{6A24ED1B-900C-525B-686F-A3C4D786B4BA}"/>
-              </a:ext>
-            </a:extLst>
-          </p:cNvPr>
-          <p:cNvSpPr txBox="1"/>
-          <p:nvPr/>
-        </p:nvSpPr>
-        <p:spPr>
-          <a:xfrm>
-            <a:off x="7029546" y="29787"/>
-            <a:ext cx="250698" cy="461665"/>
-          </a:xfrm>
-          <a:prstGeom prst="rect">
-            <a:avLst/>
-          </a:prstGeom>
-          <a:noFill/>
-        </p:spPr>
-        <p:txBody>
-          <a:bodyPr wrap="square" rtlCol="0">
-            <a:spAutoFit/>
-          </a:bodyPr>
-          <a:lstStyle/>
-          <a:p>
-            <a:r>
-              <a:rPr lang="en-US" sz="2400" b="1" dirty="0"/>
-              <a:t>C</a:t>
-            </a:r>
           </a:p>
         </p:txBody>
       </p:sp>
